--- a/strategy/Bizzing-Strategy-Org.pptx
+++ b/strategy/Bizzing-Strategy-Org.pptx
@@ -46,9 +46,11 @@
     <p:sldId id="294" r:id="rId40"/>
     <p:sldId id="295" r:id="rId41"/>
     <p:sldId id="296" r:id="rId42"/>
+    <p:sldId id="297" r:id="rId43"/>
+    <p:sldId id="298" r:id="rId44"/>
   </p:sldIdLst>
   <p:notesMasterIdLst>
-    <p:notesMasterId r:id="rId43"/>
+    <p:notesMasterId r:id="rId45"/>
   </p:notesMasterIdLst>
   <p:sldSz cx="12192000" cy="6858000"/>
   <p:notesSz cx="6858000" cy="12192000"/>
@@ -4132,7 +4134,7 @@
           <a:p>
             <a:r>
               <a:rPr lang="en-US" dirty="0"/>
-              <a:t/>
+              <a:t>Ranked by return on unlock, not by size. Bee networks and Amazon are near-free and should start in Year 1; districts are a 9–18 month enterprise sale and should wait.</a:t>
             </a:r>
             <a:endParaRPr lang="en-US" dirty="0"/>
           </a:p>
@@ -4156,6 +4158,182 @@
             <a:fld id="{F7021451-1387-4CA6-816F-3879F97B5CBC}" type="slidenum">
               <a:rPr lang="en-US"/>
               <a:t>41</a:t>
+            </a:fld>
+            <a:endParaRPr lang="en-US"/>
+          </a:p>
+        </p:txBody>
+      </p:sp>
+    </p:spTree>
+    <p:extLst>
+      <p:ext uri="{BB962C8B-B14F-4D97-AF65-F5344CB8AC3E}">
+        <p14:creationId xmlns:p14="http://schemas.microsoft.com/office/powerpoint/2010/main" val="1024086991"/>
+      </p:ext>
+    </p:extLst>
+  </p:cSld>
+  <p:clrMapOvr>
+    <a:masterClrMapping/>
+  </p:clrMapOvr>
+</p:notes>
+</file>
+
+<file path=ppt/notesSlides/notesSlide42.xml><?xml version="1.0" encoding="utf-8"?>
+<p:notes xmlns:a="http://schemas.openxmlformats.org/drawingml/2006/main" xmlns:r="http://schemas.openxmlformats.org/officeDocument/2006/relationships" xmlns:p="http://schemas.openxmlformats.org/presentationml/2006/main">
+  <p:cSld>
+    <p:spTree>
+      <p:nvGrpSpPr>
+        <p:cNvPr id="1" name=""/>
+        <p:cNvGrpSpPr/>
+        <p:nvPr/>
+      </p:nvGrpSpPr>
+      <p:grpSpPr>
+        <a:xfrm>
+          <a:off x="0" y="0"/>
+          <a:ext cx="0" cy="0"/>
+          <a:chOff x="0" y="0"/>
+          <a:chExt cx="0" cy="0"/>
+        </a:xfrm>
+      </p:grpSpPr>
+      <p:sp>
+        <p:nvSpPr>
+          <p:cNvPr id="2" name="Slide Image Placeholder 1"/>
+          <p:cNvSpPr>
+            <a:spLocks noGrp="1" noRot="1" noChangeAspect="1"/>
+          </p:cNvSpPr>
+          <p:nvPr>
+            <p:ph type="sldImg"/>
+          </p:nvPr>
+        </p:nvSpPr>
+        <p:spPr/>
+      </p:sp>
+      <p:sp>
+        <p:nvSpPr>
+          <p:cNvPr id="3" name="Notes Placeholder 2"/>
+          <p:cNvSpPr>
+            <a:spLocks noGrp="1"/>
+          </p:cNvSpPr>
+          <p:nvPr>
+            <p:ph type="body" idx="1"/>
+          </p:nvPr>
+        </p:nvSpPr>
+        <p:spPr/>
+        <p:txBody>
+          <a:bodyPr/>
+          <a:lstStyle/>
+          <a:p>
+            <a:r>
+              <a:rPr lang="en-US" dirty="0"/>
+              <a:t>Research brief, not a contact sheet. The NSF angle is the strongest because the product is already built to their word lists — that is verifiable in the repo (nsf-vocab26-data.js, nsf-finals500-data.js).</a:t>
+            </a:r>
+            <a:endParaRPr lang="en-US" dirty="0"/>
+          </a:p>
+        </p:txBody>
+      </p:sp>
+      <p:sp>
+        <p:nvSpPr>
+          <p:cNvPr id="4" name="Slide Number Placeholder 3"/>
+          <p:cNvSpPr>
+            <a:spLocks noGrp="1"/>
+          </p:cNvSpPr>
+          <p:nvPr>
+            <p:ph type="sldNum" sz="quarter" idx="10"/>
+          </p:nvPr>
+        </p:nvSpPr>
+        <p:spPr/>
+        <p:txBody>
+          <a:bodyPr/>
+          <a:lstStyle/>
+          <a:p>
+            <a:fld id="{F7021451-1387-4CA6-816F-3879F97B5CBC}" type="slidenum">
+              <a:rPr lang="en-US"/>
+              <a:t>42</a:t>
+            </a:fld>
+            <a:endParaRPr lang="en-US"/>
+          </a:p>
+        </p:txBody>
+      </p:sp>
+    </p:spTree>
+    <p:extLst>
+      <p:ext uri="{BB962C8B-B14F-4D97-AF65-F5344CB8AC3E}">
+        <p14:creationId xmlns:p14="http://schemas.microsoft.com/office/powerpoint/2010/main" val="1024086991"/>
+      </p:ext>
+    </p:extLst>
+  </p:cSld>
+  <p:clrMapOvr>
+    <a:masterClrMapping/>
+  </p:clrMapOvr>
+</p:notes>
+</file>
+
+<file path=ppt/notesSlides/notesSlide43.xml><?xml version="1.0" encoding="utf-8"?>
+<p:notes xmlns:a="http://schemas.openxmlformats.org/drawingml/2006/main" xmlns:r="http://schemas.openxmlformats.org/officeDocument/2006/relationships" xmlns:p="http://schemas.openxmlformats.org/presentationml/2006/main">
+  <p:cSld>
+    <p:spTree>
+      <p:nvGrpSpPr>
+        <p:cNvPr id="1" name=""/>
+        <p:cNvGrpSpPr/>
+        <p:nvPr/>
+      </p:nvGrpSpPr>
+      <p:grpSpPr>
+        <a:xfrm>
+          <a:off x="0" y="0"/>
+          <a:ext cx="0" cy="0"/>
+          <a:chOff x="0" y="0"/>
+          <a:chExt cx="0" cy="0"/>
+        </a:xfrm>
+      </p:grpSpPr>
+      <p:sp>
+        <p:nvSpPr>
+          <p:cNvPr id="2" name="Slide Image Placeholder 1"/>
+          <p:cNvSpPr>
+            <a:spLocks noGrp="1" noRot="1" noChangeAspect="1"/>
+          </p:cNvSpPr>
+          <p:nvPr>
+            <p:ph type="sldImg"/>
+          </p:nvPr>
+        </p:nvSpPr>
+        <p:spPr/>
+      </p:sp>
+      <p:sp>
+        <p:nvSpPr>
+          <p:cNvPr id="3" name="Notes Placeholder 2"/>
+          <p:cNvSpPr>
+            <a:spLocks noGrp="1"/>
+          </p:cNvSpPr>
+          <p:nvPr>
+            <p:ph type="body" idx="1"/>
+          </p:nvPr>
+        </p:nvSpPr>
+        <p:spPr/>
+        <p:txBody>
+          <a:bodyPr/>
+          <a:lstStyle/>
+          <a:p>
+            <a:r>
+              <a:rPr lang="en-US" dirty="0"/>
+              <a:t/>
+            </a:r>
+            <a:endParaRPr lang="en-US" dirty="0"/>
+          </a:p>
+        </p:txBody>
+      </p:sp>
+      <p:sp>
+        <p:nvSpPr>
+          <p:cNvPr id="4" name="Slide Number Placeholder 3"/>
+          <p:cNvSpPr>
+            <a:spLocks noGrp="1"/>
+          </p:cNvSpPr>
+          <p:nvPr>
+            <p:ph type="sldNum" sz="quarter" idx="10"/>
+          </p:nvPr>
+        </p:nvSpPr>
+        <p:spPr/>
+        <p:txBody>
+          <a:bodyPr/>
+          <a:lstStyle/>
+          <a:p>
+            <a:fld id="{F7021451-1387-4CA6-816F-3879F97B5CBC}" type="slidenum">
+              <a:rPr lang="en-US"/>
+              <a:t>43</a:t>
             </a:fld>
             <a:endParaRPr lang="en-US"/>
           </a:p>
@@ -50225,6 +50403,5207 @@
     <p:bg>
       <p:bgPr>
         <a:solidFill>
+          <a:srgbClr val="FFFFFF"/>
+        </a:solidFill>
+      </p:bgPr>
+    </p:bg>
+    <p:spTree>
+      <p:nvGrpSpPr>
+        <p:cNvPr id="1" name=""/>
+        <p:cNvGrpSpPr/>
+        <p:nvPr/>
+      </p:nvGrpSpPr>
+      <p:grpSpPr>
+        <a:xfrm>
+          <a:off x="0" y="0"/>
+          <a:ext cx="0" cy="0"/>
+          <a:chOff x="0" y="0"/>
+          <a:chExt cx="0" cy="0"/>
+        </a:xfrm>
+      </p:grpSpPr>
+      <p:sp>
+        <p:nvSpPr>
+          <p:cNvPr id="2" name="Text 0"/>
+          <p:cNvSpPr/>
+          <p:nvPr/>
+        </p:nvSpPr>
+        <p:spPr>
+          <a:xfrm>
+            <a:off x="640080" y="402336"/>
+            <a:ext cx="7315200" cy="256032"/>
+          </a:xfrm>
+          <a:prstGeom prst="rect">
+            <a:avLst/>
+          </a:prstGeom>
+          <a:noFill/>
+          <a:ln/>
+        </p:spPr>
+        <p:txBody>
+          <a:bodyPr wrap="square" lIns="0" tIns="0" rIns="0" bIns="0" rtlCol="0" anchor="ctr"/>
+          <a:lstStyle/>
+          <a:p>
+            <a:pPr indent="0" marL="0">
+              <a:buNone/>
+            </a:pPr>
+            <a:r>
+              <a:rPr lang="en-US" sz="1150" b="1" spc="240" kern="0" dirty="0">
+                <a:solidFill>
+                  <a:srgbClr val="6C4FE0"/>
+                </a:solidFill>
+                <a:latin typeface="Calibri" pitchFamily="34" charset="0"/>
+                <a:ea typeface="Calibri" pitchFamily="34" charset="-122"/>
+                <a:cs typeface="Calibri" pitchFamily="34" charset="-120"/>
+              </a:rPr>
+              <a:t>ADDITIONAL OPPORTUNITIES</a:t>
+            </a:r>
+            <a:endParaRPr lang="en-US" sz="1150" dirty="0"/>
+          </a:p>
+        </p:txBody>
+      </p:sp>
+      <p:sp>
+        <p:nvSpPr>
+          <p:cNvPr id="3" name="Text 1"/>
+          <p:cNvSpPr/>
+          <p:nvPr/>
+        </p:nvSpPr>
+        <p:spPr>
+          <a:xfrm>
+            <a:off x="640080" y="694944"/>
+            <a:ext cx="10607040" cy="749808"/>
+          </a:xfrm>
+          <a:prstGeom prst="rect">
+            <a:avLst/>
+          </a:prstGeom>
+          <a:noFill/>
+          <a:ln/>
+        </p:spPr>
+        <p:txBody>
+          <a:bodyPr wrap="square" lIns="0" tIns="0" rIns="0" bIns="0" rtlCol="0" anchor="ctr"/>
+          <a:lstStyle/>
+          <a:p>
+            <a:pPr indent="0" marL="0">
+              <a:buNone/>
+            </a:pPr>
+            <a:r>
+              <a:rPr lang="en-US" sz="2900" b="1" dirty="0">
+                <a:solidFill>
+                  <a:srgbClr val="241E33"/>
+                </a:solidFill>
+                <a:latin typeface="Cambria" pitchFamily="34" charset="0"/>
+                <a:ea typeface="Cambria" pitchFamily="34" charset="-122"/>
+                <a:cs typeface="Cambria" pitchFamily="34" charset="-120"/>
+              </a:rPr>
+              <a:t>Six doors we have not opened</a:t>
+            </a:r>
+            <a:endParaRPr lang="en-US" sz="2900" dirty="0"/>
+          </a:p>
+        </p:txBody>
+      </p:sp>
+      <p:sp>
+        <p:nvSpPr>
+          <p:cNvPr id="4" name="Text 2"/>
+          <p:cNvSpPr/>
+          <p:nvPr/>
+        </p:nvSpPr>
+        <p:spPr>
+          <a:xfrm>
+            <a:off x="640080" y="1408176"/>
+            <a:ext cx="10607040" cy="457200"/>
+          </a:xfrm>
+          <a:prstGeom prst="rect">
+            <a:avLst/>
+          </a:prstGeom>
+          <a:noFill/>
+          <a:ln/>
+        </p:spPr>
+        <p:txBody>
+          <a:bodyPr wrap="square" lIns="0" tIns="0" rIns="0" bIns="0" rtlCol="0" anchor="ctr"/>
+          <a:lstStyle/>
+          <a:p>
+            <a:pPr indent="0" marL="0">
+              <a:lnSpc>
+                <a:spcPts val="1600"/>
+              </a:lnSpc>
+              <a:buNone/>
+            </a:pPr>
+            <a:r>
+              <a:rPr lang="en-US" sz="1350" dirty="0">
+                <a:solidFill>
+                  <a:srgbClr val="7A7291"/>
+                </a:solidFill>
+                <a:latin typeface="Calibri" pitchFamily="34" charset="0"/>
+                <a:ea typeface="Calibri" pitchFamily="34" charset="-122"/>
+                <a:cs typeface="Calibri" pitchFamily="34" charset="-120"/>
+              </a:rPr>
+              <a:t>None of this is in the five-year P&amp;L, and it should not be — the plan has to work without it. Each is ranked by RETURN ON UNLOCK, which is not the order of headline size.</a:t>
+            </a:r>
+            <a:endParaRPr lang="en-US" sz="1350" dirty="0"/>
+          </a:p>
+        </p:txBody>
+      </p:sp>
+      <p:sp>
+        <p:nvSpPr>
+          <p:cNvPr id="5" name="Text 3"/>
+          <p:cNvSpPr/>
+          <p:nvPr/>
+        </p:nvSpPr>
+        <p:spPr>
+          <a:xfrm>
+            <a:off x="3566160" y="1956816"/>
+            <a:ext cx="914400" cy="237744"/>
+          </a:xfrm>
+          <a:prstGeom prst="rect">
+            <a:avLst/>
+          </a:prstGeom>
+          <a:noFill/>
+          <a:ln/>
+        </p:spPr>
+        <p:txBody>
+          <a:bodyPr wrap="square" lIns="0" tIns="0" rIns="0" bIns="0" rtlCol="0" anchor="ctr"/>
+          <a:lstStyle/>
+          <a:p>
+            <a:pPr algn="r" indent="0" marL="0">
+              <a:buNone/>
+            </a:pPr>
+            <a:r>
+              <a:rPr lang="en-US" sz="750" b="1" spc="110" kern="0" dirty="0">
+                <a:solidFill>
+                  <a:srgbClr val="4A31B0"/>
+                </a:solidFill>
+                <a:latin typeface="Calibri" pitchFamily="34" charset="0"/>
+                <a:ea typeface="Calibri" pitchFamily="34" charset="-122"/>
+                <a:cs typeface="Calibri" pitchFamily="34" charset="-120"/>
+              </a:rPr>
+              <a:t>ANNUAL VALUE</a:t>
+            </a:r>
+            <a:endParaRPr lang="en-US" sz="750" dirty="0"/>
+          </a:p>
+        </p:txBody>
+      </p:sp>
+      <p:sp>
+        <p:nvSpPr>
+          <p:cNvPr id="6" name="Text 4"/>
+          <p:cNvSpPr/>
+          <p:nvPr/>
+        </p:nvSpPr>
+        <p:spPr>
+          <a:xfrm>
+            <a:off x="4663440" y="1956816"/>
+            <a:ext cx="4663440" cy="237744"/>
+          </a:xfrm>
+          <a:prstGeom prst="rect">
+            <a:avLst/>
+          </a:prstGeom>
+          <a:noFill/>
+          <a:ln/>
+        </p:spPr>
+        <p:txBody>
+          <a:bodyPr wrap="square" lIns="0" tIns="0" rIns="0" bIns="0" rtlCol="0" anchor="ctr"/>
+          <a:lstStyle/>
+          <a:p>
+            <a:pPr algn="l" indent="0" marL="0">
+              <a:buNone/>
+            </a:pPr>
+            <a:r>
+              <a:rPr lang="en-US" sz="750" b="1" spc="110" kern="0" dirty="0">
+                <a:solidFill>
+                  <a:srgbClr val="4A31B0"/>
+                </a:solidFill>
+                <a:latin typeface="Calibri" pitchFamily="34" charset="0"/>
+                <a:ea typeface="Calibri" pitchFamily="34" charset="-122"/>
+                <a:cs typeface="Calibri" pitchFamily="34" charset="-120"/>
+              </a:rPr>
+              <a:t>WHAT IT TAKES TO UNLOCK</a:t>
+            </a:r>
+            <a:endParaRPr lang="en-US" sz="750" dirty="0"/>
+          </a:p>
+        </p:txBody>
+      </p:sp>
+      <p:sp>
+        <p:nvSpPr>
+          <p:cNvPr id="7" name="Text 5"/>
+          <p:cNvSpPr/>
+          <p:nvPr/>
+        </p:nvSpPr>
+        <p:spPr>
+          <a:xfrm>
+            <a:off x="9464040" y="1956816"/>
+            <a:ext cx="914400" cy="237744"/>
+          </a:xfrm>
+          <a:prstGeom prst="rect">
+            <a:avLst/>
+          </a:prstGeom>
+          <a:noFill/>
+          <a:ln/>
+        </p:spPr>
+        <p:txBody>
+          <a:bodyPr wrap="square" lIns="0" tIns="0" rIns="0" bIns="0" rtlCol="0" anchor="ctr"/>
+          <a:lstStyle/>
+          <a:p>
+            <a:pPr algn="r" indent="0" marL="0">
+              <a:buNone/>
+            </a:pPr>
+            <a:r>
+              <a:rPr lang="en-US" sz="750" b="1" spc="110" kern="0" dirty="0">
+                <a:solidFill>
+                  <a:srgbClr val="4A31B0"/>
+                </a:solidFill>
+                <a:latin typeface="Calibri" pitchFamily="34" charset="0"/>
+                <a:ea typeface="Calibri" pitchFamily="34" charset="-122"/>
+                <a:cs typeface="Calibri" pitchFamily="34" charset="-120"/>
+              </a:rPr>
+              <a:t>UNLOCK COST</a:t>
+            </a:r>
+            <a:endParaRPr lang="en-US" sz="750" dirty="0"/>
+          </a:p>
+        </p:txBody>
+      </p:sp>
+      <p:sp>
+        <p:nvSpPr>
+          <p:cNvPr id="8" name="Text 6"/>
+          <p:cNvSpPr/>
+          <p:nvPr/>
+        </p:nvSpPr>
+        <p:spPr>
+          <a:xfrm>
+            <a:off x="10515600" y="1956816"/>
+            <a:ext cx="868680" cy="237744"/>
+          </a:xfrm>
+          <a:prstGeom prst="rect">
+            <a:avLst/>
+          </a:prstGeom>
+          <a:noFill/>
+          <a:ln/>
+        </p:spPr>
+        <p:txBody>
+          <a:bodyPr wrap="square" lIns="0" tIns="0" rIns="0" bIns="0" rtlCol="0" anchor="ctr"/>
+          <a:lstStyle/>
+          <a:p>
+            <a:pPr algn="ctr" indent="0" marL="0">
+              <a:buNone/>
+            </a:pPr>
+            <a:r>
+              <a:rPr lang="en-US" sz="750" b="1" spc="110" kern="0" dirty="0">
+                <a:solidFill>
+                  <a:srgbClr val="4A31B0"/>
+                </a:solidFill>
+                <a:latin typeface="Calibri" pitchFamily="34" charset="0"/>
+                <a:ea typeface="Calibri" pitchFamily="34" charset="-122"/>
+                <a:cs typeface="Calibri" pitchFamily="34" charset="-120"/>
+              </a:rPr>
+              <a:t>RETURN</a:t>
+            </a:r>
+            <a:endParaRPr lang="en-US" sz="750" dirty="0"/>
+          </a:p>
+        </p:txBody>
+      </p:sp>
+      <p:sp>
+        <p:nvSpPr>
+          <p:cNvPr id="9" name="Shape 7"/>
+          <p:cNvSpPr/>
+          <p:nvPr/>
+        </p:nvSpPr>
+        <p:spPr>
+          <a:xfrm>
+            <a:off x="512064" y="2203704"/>
+            <a:ext cx="10954512" cy="585216"/>
+          </a:xfrm>
+          <a:prstGeom prst="roundRect">
+            <a:avLst>
+              <a:gd name="adj" fmla="val 14063"/>
+            </a:avLst>
+          </a:prstGeom>
+          <a:solidFill>
+            <a:srgbClr val="EFEBF8"/>
+          </a:solidFill>
+          <a:ln/>
+        </p:spPr>
+      </p:sp>
+      <p:sp>
+        <p:nvSpPr>
+          <p:cNvPr id="10" name="Shape 8"/>
+          <p:cNvSpPr/>
+          <p:nvPr/>
+        </p:nvSpPr>
+        <p:spPr>
+          <a:xfrm rot="5400000">
+            <a:off x="640080" y="2322576"/>
+            <a:ext cx="219456" cy="219456"/>
+          </a:xfrm>
+          <a:prstGeom prst="hexagon">
+            <a:avLst/>
+          </a:prstGeom>
+          <a:solidFill>
+            <a:srgbClr val="178A4C"/>
+          </a:solidFill>
+          <a:ln/>
+        </p:spPr>
+      </p:sp>
+      <p:sp>
+        <p:nvSpPr>
+          <p:cNvPr id="11" name="Text 9"/>
+          <p:cNvSpPr/>
+          <p:nvPr/>
+        </p:nvSpPr>
+        <p:spPr>
+          <a:xfrm>
+            <a:off x="950976" y="2212848"/>
+            <a:ext cx="1874520" cy="237744"/>
+          </a:xfrm>
+          <a:prstGeom prst="rect">
+            <a:avLst/>
+          </a:prstGeom>
+          <a:noFill/>
+          <a:ln/>
+        </p:spPr>
+        <p:txBody>
+          <a:bodyPr wrap="square" lIns="0" tIns="0" rIns="0" bIns="0" rtlCol="0" anchor="ctr"/>
+          <a:lstStyle/>
+          <a:p>
+            <a:pPr indent="0" marL="0">
+              <a:buNone/>
+            </a:pPr>
+            <a:r>
+              <a:rPr lang="en-US" sz="1150" b="1" dirty="0">
+                <a:solidFill>
+                  <a:srgbClr val="241E33"/>
+                </a:solidFill>
+                <a:latin typeface="Cambria" pitchFamily="34" charset="0"/>
+                <a:ea typeface="Cambria" pitchFamily="34" charset="-122"/>
+                <a:cs typeface="Cambria" pitchFamily="34" charset="-120"/>
+              </a:rPr>
+              <a:t>Bee &amp; tutor networks</a:t>
+            </a:r>
+            <a:endParaRPr lang="en-US" sz="1150" dirty="0"/>
+          </a:p>
+        </p:txBody>
+      </p:sp>
+      <p:sp>
+        <p:nvSpPr>
+          <p:cNvPr id="12" name="Text 10"/>
+          <p:cNvSpPr/>
+          <p:nvPr/>
+        </p:nvSpPr>
+        <p:spPr>
+          <a:xfrm>
+            <a:off x="2852928" y="2231136"/>
+            <a:ext cx="640080" cy="201168"/>
+          </a:xfrm>
+          <a:prstGeom prst="rect">
+            <a:avLst/>
+          </a:prstGeom>
+          <a:noFill/>
+          <a:ln/>
+        </p:spPr>
+        <p:txBody>
+          <a:bodyPr wrap="square" lIns="0" tIns="0" rIns="0" bIns="0" rtlCol="0" anchor="ctr"/>
+          <a:lstStyle/>
+          <a:p>
+            <a:pPr algn="ctr" indent="0" marL="0">
+              <a:buNone/>
+            </a:pPr>
+            <a:r>
+              <a:rPr lang="en-US" sz="750" b="1" dirty="0">
+                <a:solidFill>
+                  <a:srgbClr val="7A7291"/>
+                </a:solidFill>
+                <a:latin typeface="Calibri" pitchFamily="34" charset="0"/>
+                <a:ea typeface="Calibri" pitchFamily="34" charset="-122"/>
+                <a:cs typeface="Calibri" pitchFamily="34" charset="-120"/>
+              </a:rPr>
+              <a:t>Year 2</a:t>
+            </a:r>
+            <a:endParaRPr lang="en-US" sz="750" dirty="0"/>
+          </a:p>
+        </p:txBody>
+      </p:sp>
+      <p:sp>
+        <p:nvSpPr>
+          <p:cNvPr id="13" name="Text 11"/>
+          <p:cNvSpPr/>
+          <p:nvPr/>
+        </p:nvSpPr>
+        <p:spPr>
+          <a:xfrm>
+            <a:off x="950976" y="2432304"/>
+            <a:ext cx="2514600" cy="347472"/>
+          </a:xfrm>
+          <a:prstGeom prst="rect">
+            <a:avLst/>
+          </a:prstGeom>
+          <a:noFill/>
+          <a:ln/>
+        </p:spPr>
+        <p:txBody>
+          <a:bodyPr wrap="square" lIns="0" tIns="0" rIns="0" bIns="0" rtlCol="0" anchor="ctr"/>
+          <a:lstStyle/>
+          <a:p>
+            <a:pPr indent="0" marL="0">
+              <a:lnSpc>
+                <a:spcPts val="900"/>
+              </a:lnSpc>
+              <a:buNone/>
+            </a:pPr>
+            <a:r>
+              <a:rPr lang="en-US" sz="750" dirty="0">
+                <a:solidFill>
+                  <a:srgbClr val="7A7291"/>
+                </a:solidFill>
+                <a:latin typeface="Calibri" pitchFamily="34" charset="0"/>
+                <a:ea typeface="Calibri" pitchFamily="34" charset="-122"/>
+                <a:cs typeface="Calibri" pitchFamily="34" charset="-120"/>
+              </a:rPr>
+              <a:t>NSF and SASB chapters reach tens of thousands of exactly our families. 5,000 households at a $60 partner price.</a:t>
+            </a:r>
+            <a:endParaRPr lang="en-US" sz="750" dirty="0"/>
+          </a:p>
+        </p:txBody>
+      </p:sp>
+      <p:sp>
+        <p:nvSpPr>
+          <p:cNvPr id="14" name="Text 12"/>
+          <p:cNvSpPr/>
+          <p:nvPr/>
+        </p:nvSpPr>
+        <p:spPr>
+          <a:xfrm>
+            <a:off x="3566160" y="2249424"/>
+            <a:ext cx="914400" cy="493776"/>
+          </a:xfrm>
+          <a:prstGeom prst="rect">
+            <a:avLst/>
+          </a:prstGeom>
+          <a:noFill/>
+          <a:ln/>
+        </p:spPr>
+        <p:txBody>
+          <a:bodyPr wrap="square" lIns="0" tIns="0" rIns="0" bIns="0" rtlCol="0" anchor="ctr"/>
+          <a:lstStyle/>
+          <a:p>
+            <a:pPr algn="r" indent="0" marL="0">
+              <a:buNone/>
+            </a:pPr>
+            <a:r>
+              <a:rPr lang="en-US" sz="1500" b="1" dirty="0">
+                <a:solidFill>
+                  <a:srgbClr val="178A4C"/>
+                </a:solidFill>
+                <a:latin typeface="Cambria" pitchFamily="34" charset="0"/>
+                <a:ea typeface="Cambria" pitchFamily="34" charset="-122"/>
+                <a:cs typeface="Cambria" pitchFamily="34" charset="-120"/>
+              </a:rPr>
+              <a:t>$300k</a:t>
+            </a:r>
+            <a:endParaRPr lang="en-US" sz="1500" dirty="0"/>
+          </a:p>
+        </p:txBody>
+      </p:sp>
+      <p:sp>
+        <p:nvSpPr>
+          <p:cNvPr id="15" name="Text 13"/>
+          <p:cNvSpPr/>
+          <p:nvPr/>
+        </p:nvSpPr>
+        <p:spPr>
+          <a:xfrm>
+            <a:off x="4663440" y="2249424"/>
+            <a:ext cx="4663440" cy="512064"/>
+          </a:xfrm>
+          <a:prstGeom prst="rect">
+            <a:avLst/>
+          </a:prstGeom>
+          <a:noFill/>
+          <a:ln/>
+        </p:spPr>
+        <p:txBody>
+          <a:bodyPr wrap="square" lIns="0" tIns="0" rIns="0" bIns="0" rtlCol="0" anchor="ctr"/>
+          <a:lstStyle/>
+          <a:p>
+            <a:pPr indent="0" marL="0">
+              <a:lnSpc>
+                <a:spcPts val="1050"/>
+              </a:lnSpc>
+              <a:buNone/>
+            </a:pPr>
+            <a:r>
+              <a:rPr lang="en-US" sz="850" dirty="0">
+                <a:solidFill>
+                  <a:srgbClr val="4A4360"/>
+                </a:solidFill>
+                <a:latin typeface="Calibri" pitchFamily="34" charset="0"/>
+                <a:ea typeface="Calibri" pitchFamily="34" charset="-122"/>
+                <a:cs typeface="Calibri" pitchFamily="34" charset="-120"/>
+              </a:rPr>
+              <a:t>One relationship, a co-branded practice track, a revenue share. The app already ships NSF’s own 2026 word lists — we are not asking them to trust a stranger.</a:t>
+            </a:r>
+            <a:endParaRPr lang="en-US" sz="850" dirty="0"/>
+          </a:p>
+        </p:txBody>
+      </p:sp>
+      <p:sp>
+        <p:nvSpPr>
+          <p:cNvPr id="16" name="Text 14"/>
+          <p:cNvSpPr/>
+          <p:nvPr/>
+        </p:nvSpPr>
+        <p:spPr>
+          <a:xfrm>
+            <a:off x="9464040" y="2249424"/>
+            <a:ext cx="914400" cy="493776"/>
+          </a:xfrm>
+          <a:prstGeom prst="rect">
+            <a:avLst/>
+          </a:prstGeom>
+          <a:noFill/>
+          <a:ln/>
+        </p:spPr>
+        <p:txBody>
+          <a:bodyPr wrap="square" lIns="0" tIns="0" rIns="0" bIns="0" rtlCol="0" anchor="ctr"/>
+          <a:lstStyle/>
+          <a:p>
+            <a:pPr algn="r" indent="0" marL="0">
+              <a:buNone/>
+            </a:pPr>
+            <a:r>
+              <a:rPr lang="en-US" sz="1100" dirty="0">
+                <a:solidFill>
+                  <a:srgbClr val="4A4360"/>
+                </a:solidFill>
+                <a:latin typeface="Calibri" pitchFamily="34" charset="0"/>
+                <a:ea typeface="Calibri" pitchFamily="34" charset="-122"/>
+                <a:cs typeface="Calibri" pitchFamily="34" charset="-120"/>
+              </a:rPr>
+              <a:t>$5k</a:t>
+            </a:r>
+            <a:endParaRPr lang="en-US" sz="1100" dirty="0"/>
+          </a:p>
+        </p:txBody>
+      </p:sp>
+      <p:sp>
+        <p:nvSpPr>
+          <p:cNvPr id="17" name="Shape 15"/>
+          <p:cNvSpPr/>
+          <p:nvPr/>
+        </p:nvSpPr>
+        <p:spPr>
+          <a:xfrm>
+            <a:off x="10515600" y="2368296"/>
+            <a:ext cx="868680" cy="256032"/>
+          </a:xfrm>
+          <a:prstGeom prst="roundRect">
+            <a:avLst>
+              <a:gd name="adj" fmla="val 50000"/>
+            </a:avLst>
+          </a:prstGeom>
+          <a:solidFill>
+            <a:srgbClr val="178A4C"/>
+          </a:solidFill>
+          <a:ln/>
+        </p:spPr>
+      </p:sp>
+      <p:sp>
+        <p:nvSpPr>
+          <p:cNvPr id="18" name="Text 16"/>
+          <p:cNvSpPr/>
+          <p:nvPr/>
+        </p:nvSpPr>
+        <p:spPr>
+          <a:xfrm>
+            <a:off x="10515600" y="2368296"/>
+            <a:ext cx="868680" cy="256032"/>
+          </a:xfrm>
+          <a:prstGeom prst="rect">
+            <a:avLst/>
+          </a:prstGeom>
+          <a:noFill/>
+          <a:ln/>
+        </p:spPr>
+        <p:txBody>
+          <a:bodyPr wrap="square" lIns="0" tIns="0" rIns="0" bIns="0" rtlCol="0" anchor="ctr"/>
+          <a:lstStyle/>
+          <a:p>
+            <a:pPr algn="ctr" indent="0" marL="0">
+              <a:buNone/>
+            </a:pPr>
+            <a:r>
+              <a:rPr lang="en-US" sz="900" b="1" dirty="0">
+                <a:solidFill>
+                  <a:srgbClr val="FFFFFF"/>
+                </a:solidFill>
+                <a:latin typeface="Calibri" pitchFamily="34" charset="0"/>
+                <a:ea typeface="Calibri" pitchFamily="34" charset="-122"/>
+                <a:cs typeface="Calibri" pitchFamily="34" charset="-120"/>
+              </a:rPr>
+              <a:t>60×</a:t>
+            </a:r>
+            <a:endParaRPr lang="en-US" sz="900" dirty="0"/>
+          </a:p>
+        </p:txBody>
+      </p:sp>
+      <p:sp>
+        <p:nvSpPr>
+          <p:cNvPr id="19" name="Shape 17"/>
+          <p:cNvSpPr/>
+          <p:nvPr/>
+        </p:nvSpPr>
+        <p:spPr>
+          <a:xfrm rot="5400000">
+            <a:off x="640080" y="2944368"/>
+            <a:ext cx="219456" cy="219456"/>
+          </a:xfrm>
+          <a:prstGeom prst="hexagon">
+            <a:avLst/>
+          </a:prstGeom>
+          <a:solidFill>
+            <a:srgbClr val="178A4C"/>
+          </a:solidFill>
+          <a:ln/>
+        </p:spPr>
+      </p:sp>
+      <p:sp>
+        <p:nvSpPr>
+          <p:cNvPr id="20" name="Text 18"/>
+          <p:cNvSpPr/>
+          <p:nvPr/>
+        </p:nvSpPr>
+        <p:spPr>
+          <a:xfrm>
+            <a:off x="950976" y="2834640"/>
+            <a:ext cx="1874520" cy="237744"/>
+          </a:xfrm>
+          <a:prstGeom prst="rect">
+            <a:avLst/>
+          </a:prstGeom>
+          <a:noFill/>
+          <a:ln/>
+        </p:spPr>
+        <p:txBody>
+          <a:bodyPr wrap="square" lIns="0" tIns="0" rIns="0" bIns="0" rtlCol="0" anchor="ctr"/>
+          <a:lstStyle/>
+          <a:p>
+            <a:pPr indent="0" marL="0">
+              <a:buNone/>
+            </a:pPr>
+            <a:r>
+              <a:rPr lang="en-US" sz="1150" b="1" dirty="0">
+                <a:solidFill>
+                  <a:srgbClr val="241E33"/>
+                </a:solidFill>
+                <a:latin typeface="Cambria" pitchFamily="34" charset="0"/>
+                <a:ea typeface="Cambria" pitchFamily="34" charset="-122"/>
+                <a:cs typeface="Cambria" pitchFamily="34" charset="-120"/>
+              </a:rPr>
+              <a:t>Amazon KDP &amp; audiobook</a:t>
+            </a:r>
+            <a:endParaRPr lang="en-US" sz="1150" dirty="0"/>
+          </a:p>
+        </p:txBody>
+      </p:sp>
+      <p:sp>
+        <p:nvSpPr>
+          <p:cNvPr id="21" name="Text 19"/>
+          <p:cNvSpPr/>
+          <p:nvPr/>
+        </p:nvSpPr>
+        <p:spPr>
+          <a:xfrm>
+            <a:off x="2852928" y="2852928"/>
+            <a:ext cx="640080" cy="201168"/>
+          </a:xfrm>
+          <a:prstGeom prst="rect">
+            <a:avLst/>
+          </a:prstGeom>
+          <a:noFill/>
+          <a:ln/>
+        </p:spPr>
+        <p:txBody>
+          <a:bodyPr wrap="square" lIns="0" tIns="0" rIns="0" bIns="0" rtlCol="0" anchor="ctr"/>
+          <a:lstStyle/>
+          <a:p>
+            <a:pPr algn="ctr" indent="0" marL="0">
+              <a:buNone/>
+            </a:pPr>
+            <a:r>
+              <a:rPr lang="en-US" sz="750" b="1" dirty="0">
+                <a:solidFill>
+                  <a:srgbClr val="7A7291"/>
+                </a:solidFill>
+                <a:latin typeface="Calibri" pitchFamily="34" charset="0"/>
+                <a:ea typeface="Calibri" pitchFamily="34" charset="-122"/>
+                <a:cs typeface="Calibri" pitchFamily="34" charset="-120"/>
+              </a:rPr>
+              <a:t>Year 1</a:t>
+            </a:r>
+            <a:endParaRPr lang="en-US" sz="750" dirty="0"/>
+          </a:p>
+        </p:txBody>
+      </p:sp>
+      <p:sp>
+        <p:nvSpPr>
+          <p:cNvPr id="22" name="Text 20"/>
+          <p:cNvSpPr/>
+          <p:nvPr/>
+        </p:nvSpPr>
+        <p:spPr>
+          <a:xfrm>
+            <a:off x="950976" y="3054096"/>
+            <a:ext cx="2514600" cy="347472"/>
+          </a:xfrm>
+          <a:prstGeom prst="rect">
+            <a:avLst/>
+          </a:prstGeom>
+          <a:noFill/>
+          <a:ln/>
+        </p:spPr>
+        <p:txBody>
+          <a:bodyPr wrap="square" lIns="0" tIns="0" rIns="0" bIns="0" rtlCol="0" anchor="ctr"/>
+          <a:lstStyle/>
+          <a:p>
+            <a:pPr indent="0" marL="0">
+              <a:lnSpc>
+                <a:spcPts val="900"/>
+              </a:lnSpc>
+              <a:buNone/>
+            </a:pPr>
+            <a:r>
+              <a:rPr lang="en-US" sz="750" dirty="0">
+                <a:solidFill>
+                  <a:srgbClr val="7A7291"/>
+                </a:solidFill>
+                <a:latin typeface="Calibri" pitchFamily="34" charset="0"/>
+                <a:ea typeface="Calibri" pitchFamily="34" charset="-122"/>
+                <a:cs typeface="Calibri" pitchFamily="34" charset="-120"/>
+              </a:rPr>
+              <a:t>23 volumes are already written, typeset and illustrated. 8,000 units a year at ~$4.50 net across the list.</a:t>
+            </a:r>
+            <a:endParaRPr lang="en-US" sz="750" dirty="0"/>
+          </a:p>
+        </p:txBody>
+      </p:sp>
+      <p:sp>
+        <p:nvSpPr>
+          <p:cNvPr id="23" name="Text 21"/>
+          <p:cNvSpPr/>
+          <p:nvPr/>
+        </p:nvSpPr>
+        <p:spPr>
+          <a:xfrm>
+            <a:off x="3566160" y="2871216"/>
+            <a:ext cx="914400" cy="493776"/>
+          </a:xfrm>
+          <a:prstGeom prst="rect">
+            <a:avLst/>
+          </a:prstGeom>
+          <a:noFill/>
+          <a:ln/>
+        </p:spPr>
+        <p:txBody>
+          <a:bodyPr wrap="square" lIns="0" tIns="0" rIns="0" bIns="0" rtlCol="0" anchor="ctr"/>
+          <a:lstStyle/>
+          <a:p>
+            <a:pPr algn="r" indent="0" marL="0">
+              <a:buNone/>
+            </a:pPr>
+            <a:r>
+              <a:rPr lang="en-US" sz="1500" b="1" dirty="0">
+                <a:solidFill>
+                  <a:srgbClr val="178A4C"/>
+                </a:solidFill>
+                <a:latin typeface="Cambria" pitchFamily="34" charset="0"/>
+                <a:ea typeface="Cambria" pitchFamily="34" charset="-122"/>
+                <a:cs typeface="Cambria" pitchFamily="34" charset="-120"/>
+              </a:rPr>
+              <a:t>$45k</a:t>
+            </a:r>
+            <a:endParaRPr lang="en-US" sz="1500" dirty="0"/>
+          </a:p>
+        </p:txBody>
+      </p:sp>
+      <p:sp>
+        <p:nvSpPr>
+          <p:cNvPr id="24" name="Text 22"/>
+          <p:cNvSpPr/>
+          <p:nvPr/>
+        </p:nvSpPr>
+        <p:spPr>
+          <a:xfrm>
+            <a:off x="4663440" y="2871216"/>
+            <a:ext cx="4663440" cy="512064"/>
+          </a:xfrm>
+          <a:prstGeom prst="rect">
+            <a:avLst/>
+          </a:prstGeom>
+          <a:noFill/>
+          <a:ln/>
+        </p:spPr>
+        <p:txBody>
+          <a:bodyPr wrap="square" lIns="0" tIns="0" rIns="0" bIns="0" rtlCol="0" anchor="ctr"/>
+          <a:lstStyle/>
+          <a:p>
+            <a:pPr indent="0" marL="0">
+              <a:lnSpc>
+                <a:spcPts val="1050"/>
+              </a:lnSpc>
+              <a:buNone/>
+            </a:pPr>
+            <a:r>
+              <a:rPr lang="en-US" sz="850" dirty="0">
+                <a:solidFill>
+                  <a:srgbClr val="4A4360"/>
+                </a:solidFill>
+                <a:latin typeface="Calibri" pitchFamily="34" charset="0"/>
+                <a:ea typeface="Calibri" pitchFamily="34" charset="-122"/>
+                <a:cs typeface="Calibri" pitchFamily="34" charset="-120"/>
+              </a:rPr>
+              <a:t>ISBNs, print-ready covers, a KDP and ACX account. The audiobook narration can come off the TTS pipeline already built for the films.</a:t>
+            </a:r>
+            <a:endParaRPr lang="en-US" sz="850" dirty="0"/>
+          </a:p>
+        </p:txBody>
+      </p:sp>
+      <p:sp>
+        <p:nvSpPr>
+          <p:cNvPr id="25" name="Text 23"/>
+          <p:cNvSpPr/>
+          <p:nvPr/>
+        </p:nvSpPr>
+        <p:spPr>
+          <a:xfrm>
+            <a:off x="9464040" y="2871216"/>
+            <a:ext cx="914400" cy="493776"/>
+          </a:xfrm>
+          <a:prstGeom prst="rect">
+            <a:avLst/>
+          </a:prstGeom>
+          <a:noFill/>
+          <a:ln/>
+        </p:spPr>
+        <p:txBody>
+          <a:bodyPr wrap="square" lIns="0" tIns="0" rIns="0" bIns="0" rtlCol="0" anchor="ctr"/>
+          <a:lstStyle/>
+          <a:p>
+            <a:pPr algn="r" indent="0" marL="0">
+              <a:buNone/>
+            </a:pPr>
+            <a:r>
+              <a:rPr lang="en-US" sz="1100" dirty="0">
+                <a:solidFill>
+                  <a:srgbClr val="4A4360"/>
+                </a:solidFill>
+                <a:latin typeface="Calibri" pitchFamily="34" charset="0"/>
+                <a:ea typeface="Calibri" pitchFamily="34" charset="-122"/>
+                <a:cs typeface="Calibri" pitchFamily="34" charset="-120"/>
+              </a:rPr>
+              <a:t>$3k</a:t>
+            </a:r>
+            <a:endParaRPr lang="en-US" sz="1100" dirty="0"/>
+          </a:p>
+        </p:txBody>
+      </p:sp>
+      <p:sp>
+        <p:nvSpPr>
+          <p:cNvPr id="26" name="Shape 24"/>
+          <p:cNvSpPr/>
+          <p:nvPr/>
+        </p:nvSpPr>
+        <p:spPr>
+          <a:xfrm>
+            <a:off x="10515600" y="2990088"/>
+            <a:ext cx="868680" cy="256032"/>
+          </a:xfrm>
+          <a:prstGeom prst="roundRect">
+            <a:avLst>
+              <a:gd name="adj" fmla="val 50000"/>
+            </a:avLst>
+          </a:prstGeom>
+          <a:solidFill>
+            <a:srgbClr val="178A4C"/>
+          </a:solidFill>
+          <a:ln/>
+        </p:spPr>
+      </p:sp>
+      <p:sp>
+        <p:nvSpPr>
+          <p:cNvPr id="27" name="Text 25"/>
+          <p:cNvSpPr/>
+          <p:nvPr/>
+        </p:nvSpPr>
+        <p:spPr>
+          <a:xfrm>
+            <a:off x="10515600" y="2990088"/>
+            <a:ext cx="868680" cy="256032"/>
+          </a:xfrm>
+          <a:prstGeom prst="rect">
+            <a:avLst/>
+          </a:prstGeom>
+          <a:noFill/>
+          <a:ln/>
+        </p:spPr>
+        <p:txBody>
+          <a:bodyPr wrap="square" lIns="0" tIns="0" rIns="0" bIns="0" rtlCol="0" anchor="ctr"/>
+          <a:lstStyle/>
+          <a:p>
+            <a:pPr algn="ctr" indent="0" marL="0">
+              <a:buNone/>
+            </a:pPr>
+            <a:r>
+              <a:rPr lang="en-US" sz="900" b="1" dirty="0">
+                <a:solidFill>
+                  <a:srgbClr val="FFFFFF"/>
+                </a:solidFill>
+                <a:latin typeface="Calibri" pitchFamily="34" charset="0"/>
+                <a:ea typeface="Calibri" pitchFamily="34" charset="-122"/>
+                <a:cs typeface="Calibri" pitchFamily="34" charset="-120"/>
+              </a:rPr>
+              <a:t>15×</a:t>
+            </a:r>
+            <a:endParaRPr lang="en-US" sz="900" dirty="0"/>
+          </a:p>
+        </p:txBody>
+      </p:sp>
+      <p:sp>
+        <p:nvSpPr>
+          <p:cNvPr id="28" name="Shape 26"/>
+          <p:cNvSpPr/>
+          <p:nvPr/>
+        </p:nvSpPr>
+        <p:spPr>
+          <a:xfrm>
+            <a:off x="512064" y="3447288"/>
+            <a:ext cx="10954512" cy="585216"/>
+          </a:xfrm>
+          <a:prstGeom prst="roundRect">
+            <a:avLst>
+              <a:gd name="adj" fmla="val 14063"/>
+            </a:avLst>
+          </a:prstGeom>
+          <a:solidFill>
+            <a:srgbClr val="EFEBF8"/>
+          </a:solidFill>
+          <a:ln/>
+        </p:spPr>
+      </p:sp>
+      <p:sp>
+        <p:nvSpPr>
+          <p:cNvPr id="29" name="Shape 27"/>
+          <p:cNvSpPr/>
+          <p:nvPr/>
+        </p:nvSpPr>
+        <p:spPr>
+          <a:xfrm rot="5400000">
+            <a:off x="640080" y="3566160"/>
+            <a:ext cx="219456" cy="219456"/>
+          </a:xfrm>
+          <a:prstGeom prst="hexagon">
+            <a:avLst/>
+          </a:prstGeom>
+          <a:solidFill>
+            <a:srgbClr val="6C4FE0"/>
+          </a:solidFill>
+          <a:ln/>
+        </p:spPr>
+      </p:sp>
+      <p:sp>
+        <p:nvSpPr>
+          <p:cNvPr id="30" name="Text 28"/>
+          <p:cNvSpPr/>
+          <p:nvPr/>
+        </p:nvSpPr>
+        <p:spPr>
+          <a:xfrm>
+            <a:off x="950976" y="3456432"/>
+            <a:ext cx="1874520" cy="237744"/>
+          </a:xfrm>
+          <a:prstGeom prst="rect">
+            <a:avLst/>
+          </a:prstGeom>
+          <a:noFill/>
+          <a:ln/>
+        </p:spPr>
+        <p:txBody>
+          <a:bodyPr wrap="square" lIns="0" tIns="0" rIns="0" bIns="0" rtlCol="0" anchor="ctr"/>
+          <a:lstStyle/>
+          <a:p>
+            <a:pPr indent="0" marL="0">
+              <a:buNone/>
+            </a:pPr>
+            <a:r>
+              <a:rPr lang="en-US" sz="1150" b="1" dirty="0">
+                <a:solidFill>
+                  <a:srgbClr val="241E33"/>
+                </a:solidFill>
+                <a:latin typeface="Cambria" pitchFamily="34" charset="0"/>
+                <a:ea typeface="Cambria" pitchFamily="34" charset="-122"/>
+                <a:cs typeface="Cambria" pitchFamily="34" charset="-120"/>
+              </a:rPr>
+              <a:t>Employer learning benefit</a:t>
+            </a:r>
+            <a:endParaRPr lang="en-US" sz="1150" dirty="0"/>
+          </a:p>
+        </p:txBody>
+      </p:sp>
+      <p:sp>
+        <p:nvSpPr>
+          <p:cNvPr id="31" name="Text 29"/>
+          <p:cNvSpPr/>
+          <p:nvPr/>
+        </p:nvSpPr>
+        <p:spPr>
+          <a:xfrm>
+            <a:off x="2852928" y="3474720"/>
+            <a:ext cx="640080" cy="201168"/>
+          </a:xfrm>
+          <a:prstGeom prst="rect">
+            <a:avLst/>
+          </a:prstGeom>
+          <a:noFill/>
+          <a:ln/>
+        </p:spPr>
+        <p:txBody>
+          <a:bodyPr wrap="square" lIns="0" tIns="0" rIns="0" bIns="0" rtlCol="0" anchor="ctr"/>
+          <a:lstStyle/>
+          <a:p>
+            <a:pPr algn="ctr" indent="0" marL="0">
+              <a:buNone/>
+            </a:pPr>
+            <a:r>
+              <a:rPr lang="en-US" sz="750" b="1" dirty="0">
+                <a:solidFill>
+                  <a:srgbClr val="7A7291"/>
+                </a:solidFill>
+                <a:latin typeface="Calibri" pitchFamily="34" charset="0"/>
+                <a:ea typeface="Calibri" pitchFamily="34" charset="-122"/>
+                <a:cs typeface="Calibri" pitchFamily="34" charset="-120"/>
+              </a:rPr>
+              <a:t>Year 4</a:t>
+            </a:r>
+            <a:endParaRPr lang="en-US" sz="750" dirty="0"/>
+          </a:p>
+        </p:txBody>
+      </p:sp>
+      <p:sp>
+        <p:nvSpPr>
+          <p:cNvPr id="32" name="Text 30"/>
+          <p:cNvSpPr/>
+          <p:nvPr/>
+        </p:nvSpPr>
+        <p:spPr>
+          <a:xfrm>
+            <a:off x="950976" y="3675888"/>
+            <a:ext cx="2514600" cy="347472"/>
+          </a:xfrm>
+          <a:prstGeom prst="rect">
+            <a:avLst/>
+          </a:prstGeom>
+          <a:noFill/>
+          <a:ln/>
+        </p:spPr>
+        <p:txBody>
+          <a:bodyPr wrap="square" lIns="0" tIns="0" rIns="0" bIns="0" rtlCol="0" anchor="ctr"/>
+          <a:lstStyle/>
+          <a:p>
+            <a:pPr indent="0" marL="0">
+              <a:lnSpc>
+                <a:spcPts val="900"/>
+              </a:lnSpc>
+              <a:buNone/>
+            </a:pPr>
+            <a:r>
+              <a:rPr lang="en-US" sz="750" dirty="0">
+                <a:solidFill>
+                  <a:srgbClr val="7A7291"/>
+                </a:solidFill>
+                <a:latin typeface="Calibri" pitchFamily="34" charset="0"/>
+                <a:ea typeface="Calibri" pitchFamily="34" charset="-122"/>
+                <a:cs typeface="Calibri" pitchFamily="34" charset="-120"/>
+              </a:rPr>
+              <a:t>Firms with large diaspora workforces already run family learning stipends. 4 employers × 200 families × $250.</a:t>
+            </a:r>
+            <a:endParaRPr lang="en-US" sz="750" dirty="0"/>
+          </a:p>
+        </p:txBody>
+      </p:sp>
+      <p:sp>
+        <p:nvSpPr>
+          <p:cNvPr id="33" name="Text 31"/>
+          <p:cNvSpPr/>
+          <p:nvPr/>
+        </p:nvSpPr>
+        <p:spPr>
+          <a:xfrm>
+            <a:off x="3566160" y="3493008"/>
+            <a:ext cx="914400" cy="493776"/>
+          </a:xfrm>
+          <a:prstGeom prst="rect">
+            <a:avLst/>
+          </a:prstGeom>
+          <a:noFill/>
+          <a:ln/>
+        </p:spPr>
+        <p:txBody>
+          <a:bodyPr wrap="square" lIns="0" tIns="0" rIns="0" bIns="0" rtlCol="0" anchor="ctr"/>
+          <a:lstStyle/>
+          <a:p>
+            <a:pPr algn="r" indent="0" marL="0">
+              <a:buNone/>
+            </a:pPr>
+            <a:r>
+              <a:rPr lang="en-US" sz="1500" b="1" dirty="0">
+                <a:solidFill>
+                  <a:srgbClr val="6C4FE0"/>
+                </a:solidFill>
+                <a:latin typeface="Cambria" pitchFamily="34" charset="0"/>
+                <a:ea typeface="Cambria" pitchFamily="34" charset="-122"/>
+                <a:cs typeface="Cambria" pitchFamily="34" charset="-120"/>
+              </a:rPr>
+              <a:t>$200k</a:t>
+            </a:r>
+            <a:endParaRPr lang="en-US" sz="1500" dirty="0"/>
+          </a:p>
+        </p:txBody>
+      </p:sp>
+      <p:sp>
+        <p:nvSpPr>
+          <p:cNvPr id="34" name="Text 32"/>
+          <p:cNvSpPr/>
+          <p:nvPr/>
+        </p:nvSpPr>
+        <p:spPr>
+          <a:xfrm>
+            <a:off x="4663440" y="3493008"/>
+            <a:ext cx="4663440" cy="512064"/>
+          </a:xfrm>
+          <a:prstGeom prst="rect">
+            <a:avLst/>
+          </a:prstGeom>
+          <a:noFill/>
+          <a:ln/>
+        </p:spPr>
+        <p:txBody>
+          <a:bodyPr wrap="square" lIns="0" tIns="0" rIns="0" bIns="0" rtlCol="0" anchor="ctr"/>
+          <a:lstStyle/>
+          <a:p>
+            <a:pPr indent="0" marL="0">
+              <a:lnSpc>
+                <a:spcPts val="1050"/>
+              </a:lnSpc>
+              <a:buNone/>
+            </a:pPr>
+            <a:r>
+              <a:rPr lang="en-US" sz="850" dirty="0">
+                <a:solidFill>
+                  <a:srgbClr val="4A4360"/>
+                </a:solidFill>
+                <a:latin typeface="Calibri" pitchFamily="34" charset="0"/>
+                <a:ea typeface="Calibri" pitchFamily="34" charset="-122"/>
+                <a:cs typeface="Calibri" pitchFamily="34" charset="-120"/>
+              </a:rPr>
+              <a:t>A W-9, invoicing, an HR-facing one-pager and a named reference. SOC 2 becomes necessary above roughly ten employers, not before.</a:t>
+            </a:r>
+            <a:endParaRPr lang="en-US" sz="850" dirty="0"/>
+          </a:p>
+        </p:txBody>
+      </p:sp>
+      <p:sp>
+        <p:nvSpPr>
+          <p:cNvPr id="35" name="Text 33"/>
+          <p:cNvSpPr/>
+          <p:nvPr/>
+        </p:nvSpPr>
+        <p:spPr>
+          <a:xfrm>
+            <a:off x="9464040" y="3493008"/>
+            <a:ext cx="914400" cy="493776"/>
+          </a:xfrm>
+          <a:prstGeom prst="rect">
+            <a:avLst/>
+          </a:prstGeom>
+          <a:noFill/>
+          <a:ln/>
+        </p:spPr>
+        <p:txBody>
+          <a:bodyPr wrap="square" lIns="0" tIns="0" rIns="0" bIns="0" rtlCol="0" anchor="ctr"/>
+          <a:lstStyle/>
+          <a:p>
+            <a:pPr algn="r" indent="0" marL="0">
+              <a:buNone/>
+            </a:pPr>
+            <a:r>
+              <a:rPr lang="en-US" sz="1100" dirty="0">
+                <a:solidFill>
+                  <a:srgbClr val="4A4360"/>
+                </a:solidFill>
+                <a:latin typeface="Calibri" pitchFamily="34" charset="0"/>
+                <a:ea typeface="Calibri" pitchFamily="34" charset="-122"/>
+                <a:cs typeface="Calibri" pitchFamily="34" charset="-120"/>
+              </a:rPr>
+              <a:t>$15k</a:t>
+            </a:r>
+            <a:endParaRPr lang="en-US" sz="1100" dirty="0"/>
+          </a:p>
+        </p:txBody>
+      </p:sp>
+      <p:sp>
+        <p:nvSpPr>
+          <p:cNvPr id="36" name="Shape 34"/>
+          <p:cNvSpPr/>
+          <p:nvPr/>
+        </p:nvSpPr>
+        <p:spPr>
+          <a:xfrm>
+            <a:off x="10515600" y="3611880"/>
+            <a:ext cx="868680" cy="256032"/>
+          </a:xfrm>
+          <a:prstGeom prst="roundRect">
+            <a:avLst>
+              <a:gd name="adj" fmla="val 50000"/>
+            </a:avLst>
+          </a:prstGeom>
+          <a:solidFill>
+            <a:srgbClr val="6C4FE0"/>
+          </a:solidFill>
+          <a:ln/>
+        </p:spPr>
+      </p:sp>
+      <p:sp>
+        <p:nvSpPr>
+          <p:cNvPr id="37" name="Text 35"/>
+          <p:cNvSpPr/>
+          <p:nvPr/>
+        </p:nvSpPr>
+        <p:spPr>
+          <a:xfrm>
+            <a:off x="10515600" y="3611880"/>
+            <a:ext cx="868680" cy="256032"/>
+          </a:xfrm>
+          <a:prstGeom prst="rect">
+            <a:avLst/>
+          </a:prstGeom>
+          <a:noFill/>
+          <a:ln/>
+        </p:spPr>
+        <p:txBody>
+          <a:bodyPr wrap="square" lIns="0" tIns="0" rIns="0" bIns="0" rtlCol="0" anchor="ctr"/>
+          <a:lstStyle/>
+          <a:p>
+            <a:pPr algn="ctr" indent="0" marL="0">
+              <a:buNone/>
+            </a:pPr>
+            <a:r>
+              <a:rPr lang="en-US" sz="900" b="1" dirty="0">
+                <a:solidFill>
+                  <a:srgbClr val="FFFFFF"/>
+                </a:solidFill>
+                <a:latin typeface="Calibri" pitchFamily="34" charset="0"/>
+                <a:ea typeface="Calibri" pitchFamily="34" charset="-122"/>
+                <a:cs typeface="Calibri" pitchFamily="34" charset="-120"/>
+              </a:rPr>
+              <a:t>13×</a:t>
+            </a:r>
+            <a:endParaRPr lang="en-US" sz="900" dirty="0"/>
+          </a:p>
+        </p:txBody>
+      </p:sp>
+      <p:sp>
+        <p:nvSpPr>
+          <p:cNvPr id="38" name="Shape 36"/>
+          <p:cNvSpPr/>
+          <p:nvPr/>
+        </p:nvSpPr>
+        <p:spPr>
+          <a:xfrm rot="5400000">
+            <a:off x="640080" y="4187952"/>
+            <a:ext cx="219456" cy="219456"/>
+          </a:xfrm>
+          <a:prstGeom prst="hexagon">
+            <a:avLst/>
+          </a:prstGeom>
+          <a:solidFill>
+            <a:srgbClr val="6C4FE0"/>
+          </a:solidFill>
+          <a:ln/>
+        </p:spPr>
+      </p:sp>
+      <p:sp>
+        <p:nvSpPr>
+          <p:cNvPr id="39" name="Text 37"/>
+          <p:cNvSpPr/>
+          <p:nvPr/>
+        </p:nvSpPr>
+        <p:spPr>
+          <a:xfrm>
+            <a:off x="950976" y="4078224"/>
+            <a:ext cx="1874520" cy="237744"/>
+          </a:xfrm>
+          <a:prstGeom prst="rect">
+            <a:avLst/>
+          </a:prstGeom>
+          <a:noFill/>
+          <a:ln/>
+        </p:spPr>
+        <p:txBody>
+          <a:bodyPr wrap="square" lIns="0" tIns="0" rIns="0" bIns="0" rtlCol="0" anchor="ctr"/>
+          <a:lstStyle/>
+          <a:p>
+            <a:pPr indent="0" marL="0">
+              <a:buNone/>
+            </a:pPr>
+            <a:r>
+              <a:rPr lang="en-US" sz="1150" b="1" dirty="0">
+                <a:solidFill>
+                  <a:srgbClr val="241E33"/>
+                </a:solidFill>
+                <a:latin typeface="Cambria" pitchFamily="34" charset="0"/>
+                <a:ea typeface="Cambria" pitchFamily="34" charset="-122"/>
+                <a:cs typeface="Cambria" pitchFamily="34" charset="-120"/>
+              </a:rPr>
+              <a:t>Weekend &amp; heritage</a:t>
+            </a:r>
+            <a:endParaRPr lang="en-US" sz="1150" dirty="0"/>
+          </a:p>
+        </p:txBody>
+      </p:sp>
+      <p:sp>
+        <p:nvSpPr>
+          <p:cNvPr id="40" name="Text 38"/>
+          <p:cNvSpPr/>
+          <p:nvPr/>
+        </p:nvSpPr>
+        <p:spPr>
+          <a:xfrm>
+            <a:off x="2852928" y="4096512"/>
+            <a:ext cx="640080" cy="201168"/>
+          </a:xfrm>
+          <a:prstGeom prst="rect">
+            <a:avLst/>
+          </a:prstGeom>
+          <a:noFill/>
+          <a:ln/>
+        </p:spPr>
+        <p:txBody>
+          <a:bodyPr wrap="square" lIns="0" tIns="0" rIns="0" bIns="0" rtlCol="0" anchor="ctr"/>
+          <a:lstStyle/>
+          <a:p>
+            <a:pPr algn="ctr" indent="0" marL="0">
+              <a:buNone/>
+            </a:pPr>
+            <a:r>
+              <a:rPr lang="en-US" sz="750" b="1" dirty="0">
+                <a:solidFill>
+                  <a:srgbClr val="7A7291"/>
+                </a:solidFill>
+                <a:latin typeface="Calibri" pitchFamily="34" charset="0"/>
+                <a:ea typeface="Calibri" pitchFamily="34" charset="-122"/>
+                <a:cs typeface="Calibri" pitchFamily="34" charset="-120"/>
+              </a:rPr>
+              <a:t>Year 2</a:t>
+            </a:r>
+            <a:endParaRPr lang="en-US" sz="750" dirty="0"/>
+          </a:p>
+        </p:txBody>
+      </p:sp>
+      <p:sp>
+        <p:nvSpPr>
+          <p:cNvPr id="41" name="Text 39"/>
+          <p:cNvSpPr/>
+          <p:nvPr/>
+        </p:nvSpPr>
+        <p:spPr>
+          <a:xfrm>
+            <a:off x="950976" y="4297680"/>
+            <a:ext cx="2514600" cy="347472"/>
+          </a:xfrm>
+          <a:prstGeom prst="rect">
+            <a:avLst/>
+          </a:prstGeom>
+          <a:noFill/>
+          <a:ln/>
+        </p:spPr>
+        <p:txBody>
+          <a:bodyPr wrap="square" lIns="0" tIns="0" rIns="0" bIns="0" rtlCol="0" anchor="ctr"/>
+          <a:lstStyle/>
+          <a:p>
+            <a:pPr indent="0" marL="0">
+              <a:lnSpc>
+                <a:spcPts val="900"/>
+              </a:lnSpc>
+              <a:buNone/>
+            </a:pPr>
+            <a:r>
+              <a:rPr lang="en-US" sz="750" dirty="0">
+                <a:solidFill>
+                  <a:srgbClr val="7A7291"/>
+                </a:solidFill>
+                <a:latin typeface="Calibri" pitchFamily="34" charset="0"/>
+                <a:ea typeface="Calibri" pitchFamily="34" charset="-122"/>
+                <a:cs typeface="Calibri" pitchFamily="34" charset="-120"/>
+              </a:rPr>
+              <a:t>Bhasha’s natural home. ~1,500 such schools in North America; 100 of them at a $500 site licence.</a:t>
+            </a:r>
+            <a:endParaRPr lang="en-US" sz="750" dirty="0"/>
+          </a:p>
+        </p:txBody>
+      </p:sp>
+      <p:sp>
+        <p:nvSpPr>
+          <p:cNvPr id="42" name="Text 40"/>
+          <p:cNvSpPr/>
+          <p:nvPr/>
+        </p:nvSpPr>
+        <p:spPr>
+          <a:xfrm>
+            <a:off x="3566160" y="4114800"/>
+            <a:ext cx="914400" cy="493776"/>
+          </a:xfrm>
+          <a:prstGeom prst="rect">
+            <a:avLst/>
+          </a:prstGeom>
+          <a:noFill/>
+          <a:ln/>
+        </p:spPr>
+        <p:txBody>
+          <a:bodyPr wrap="square" lIns="0" tIns="0" rIns="0" bIns="0" rtlCol="0" anchor="ctr"/>
+          <a:lstStyle/>
+          <a:p>
+            <a:pPr algn="r" indent="0" marL="0">
+              <a:buNone/>
+            </a:pPr>
+            <a:r>
+              <a:rPr lang="en-US" sz="1500" b="1" dirty="0">
+                <a:solidFill>
+                  <a:srgbClr val="6C4FE0"/>
+                </a:solidFill>
+                <a:latin typeface="Cambria" pitchFamily="34" charset="0"/>
+                <a:ea typeface="Cambria" pitchFamily="34" charset="-122"/>
+                <a:cs typeface="Cambria" pitchFamily="34" charset="-120"/>
+              </a:rPr>
+              <a:t>$50k</a:t>
+            </a:r>
+            <a:endParaRPr lang="en-US" sz="1500" dirty="0"/>
+          </a:p>
+        </p:txBody>
+      </p:sp>
+      <p:sp>
+        <p:nvSpPr>
+          <p:cNvPr id="43" name="Text 41"/>
+          <p:cNvSpPr/>
+          <p:nvPr/>
+        </p:nvSpPr>
+        <p:spPr>
+          <a:xfrm>
+            <a:off x="4663440" y="4114800"/>
+            <a:ext cx="4663440" cy="512064"/>
+          </a:xfrm>
+          <a:prstGeom prst="rect">
+            <a:avLst/>
+          </a:prstGeom>
+          <a:noFill/>
+          <a:ln/>
+        </p:spPr>
+        <p:txBody>
+          <a:bodyPr wrap="square" lIns="0" tIns="0" rIns="0" bIns="0" rtlCol="0" anchor="ctr"/>
+          <a:lstStyle/>
+          <a:p>
+            <a:pPr indent="0" marL="0">
+              <a:lnSpc>
+                <a:spcPts val="1050"/>
+              </a:lnSpc>
+              <a:buNone/>
+            </a:pPr>
+            <a:r>
+              <a:rPr lang="en-US" sz="850" dirty="0">
+                <a:solidFill>
+                  <a:srgbClr val="4A4360"/>
+                </a:solidFill>
+                <a:latin typeface="Calibri" pitchFamily="34" charset="0"/>
+                <a:ea typeface="Calibri" pitchFamily="34" charset="-122"/>
+                <a:cs typeface="Calibri" pitchFamily="34" charset="-120"/>
+              </a:rPr>
+              <a:t>A teacher mode, printable packs and a 30-week scope cut to a Saturday-morning rhythm. No procurement, no privacy review — a head teacher decides.</a:t>
+            </a:r>
+            <a:endParaRPr lang="en-US" sz="850" dirty="0"/>
+          </a:p>
+        </p:txBody>
+      </p:sp>
+      <p:sp>
+        <p:nvSpPr>
+          <p:cNvPr id="44" name="Text 42"/>
+          <p:cNvSpPr/>
+          <p:nvPr/>
+        </p:nvSpPr>
+        <p:spPr>
+          <a:xfrm>
+            <a:off x="9464040" y="4114800"/>
+            <a:ext cx="914400" cy="493776"/>
+          </a:xfrm>
+          <a:prstGeom prst="rect">
+            <a:avLst/>
+          </a:prstGeom>
+          <a:noFill/>
+          <a:ln/>
+        </p:spPr>
+        <p:txBody>
+          <a:bodyPr wrap="square" lIns="0" tIns="0" rIns="0" bIns="0" rtlCol="0" anchor="ctr"/>
+          <a:lstStyle/>
+          <a:p>
+            <a:pPr algn="r" indent="0" marL="0">
+              <a:buNone/>
+            </a:pPr>
+            <a:r>
+              <a:rPr lang="en-US" sz="1100" dirty="0">
+                <a:solidFill>
+                  <a:srgbClr val="4A4360"/>
+                </a:solidFill>
+                <a:latin typeface="Calibri" pitchFamily="34" charset="0"/>
+                <a:ea typeface="Calibri" pitchFamily="34" charset="-122"/>
+                <a:cs typeface="Calibri" pitchFamily="34" charset="-120"/>
+              </a:rPr>
+              <a:t>$10k</a:t>
+            </a:r>
+            <a:endParaRPr lang="en-US" sz="1100" dirty="0"/>
+          </a:p>
+        </p:txBody>
+      </p:sp>
+      <p:sp>
+        <p:nvSpPr>
+          <p:cNvPr id="45" name="Shape 43"/>
+          <p:cNvSpPr/>
+          <p:nvPr/>
+        </p:nvSpPr>
+        <p:spPr>
+          <a:xfrm>
+            <a:off x="10515600" y="4233672"/>
+            <a:ext cx="868680" cy="256032"/>
+          </a:xfrm>
+          <a:prstGeom prst="roundRect">
+            <a:avLst>
+              <a:gd name="adj" fmla="val 50000"/>
+            </a:avLst>
+          </a:prstGeom>
+          <a:solidFill>
+            <a:srgbClr val="6C4FE0"/>
+          </a:solidFill>
+          <a:ln/>
+        </p:spPr>
+      </p:sp>
+      <p:sp>
+        <p:nvSpPr>
+          <p:cNvPr id="46" name="Text 44"/>
+          <p:cNvSpPr/>
+          <p:nvPr/>
+        </p:nvSpPr>
+        <p:spPr>
+          <a:xfrm>
+            <a:off x="10515600" y="4233672"/>
+            <a:ext cx="868680" cy="256032"/>
+          </a:xfrm>
+          <a:prstGeom prst="rect">
+            <a:avLst/>
+          </a:prstGeom>
+          <a:noFill/>
+          <a:ln/>
+        </p:spPr>
+        <p:txBody>
+          <a:bodyPr wrap="square" lIns="0" tIns="0" rIns="0" bIns="0" rtlCol="0" anchor="ctr"/>
+          <a:lstStyle/>
+          <a:p>
+            <a:pPr algn="ctr" indent="0" marL="0">
+              <a:buNone/>
+            </a:pPr>
+            <a:r>
+              <a:rPr lang="en-US" sz="900" b="1" dirty="0">
+                <a:solidFill>
+                  <a:srgbClr val="FFFFFF"/>
+                </a:solidFill>
+                <a:latin typeface="Calibri" pitchFamily="34" charset="0"/>
+                <a:ea typeface="Calibri" pitchFamily="34" charset="-122"/>
+                <a:cs typeface="Calibri" pitchFamily="34" charset="-120"/>
+              </a:rPr>
+              <a:t>5×</a:t>
+            </a:r>
+            <a:endParaRPr lang="en-US" sz="900" dirty="0"/>
+          </a:p>
+        </p:txBody>
+      </p:sp>
+      <p:sp>
+        <p:nvSpPr>
+          <p:cNvPr id="47" name="Shape 45"/>
+          <p:cNvSpPr/>
+          <p:nvPr/>
+        </p:nvSpPr>
+        <p:spPr>
+          <a:xfrm>
+            <a:off x="512064" y="4690872"/>
+            <a:ext cx="10954512" cy="585216"/>
+          </a:xfrm>
+          <a:prstGeom prst="roundRect">
+            <a:avLst>
+              <a:gd name="adj" fmla="val 14063"/>
+            </a:avLst>
+          </a:prstGeom>
+          <a:solidFill>
+            <a:srgbClr val="EFEBF8"/>
+          </a:solidFill>
+          <a:ln/>
+        </p:spPr>
+      </p:sp>
+      <p:sp>
+        <p:nvSpPr>
+          <p:cNvPr id="48" name="Shape 46"/>
+          <p:cNvSpPr/>
+          <p:nvPr/>
+        </p:nvSpPr>
+        <p:spPr>
+          <a:xfrm rot="5400000">
+            <a:off x="640080" y="4809744"/>
+            <a:ext cx="219456" cy="219456"/>
+          </a:xfrm>
+          <a:prstGeom prst="hexagon">
+            <a:avLst/>
+          </a:prstGeom>
+          <a:solidFill>
+            <a:srgbClr val="F0B429"/>
+          </a:solidFill>
+          <a:ln/>
+        </p:spPr>
+      </p:sp>
+      <p:sp>
+        <p:nvSpPr>
+          <p:cNvPr id="49" name="Text 47"/>
+          <p:cNvSpPr/>
+          <p:nvPr/>
+        </p:nvSpPr>
+        <p:spPr>
+          <a:xfrm>
+            <a:off x="950976" y="4700016"/>
+            <a:ext cx="1874520" cy="237744"/>
+          </a:xfrm>
+          <a:prstGeom prst="rect">
+            <a:avLst/>
+          </a:prstGeom>
+          <a:noFill/>
+          <a:ln/>
+        </p:spPr>
+        <p:txBody>
+          <a:bodyPr wrap="square" lIns="0" tIns="0" rIns="0" bIns="0" rtlCol="0" anchor="ctr"/>
+          <a:lstStyle/>
+          <a:p>
+            <a:pPr indent="0" marL="0">
+              <a:buNone/>
+            </a:pPr>
+            <a:r>
+              <a:rPr lang="en-US" sz="1150" b="1" dirty="0">
+                <a:solidFill>
+                  <a:srgbClr val="241E33"/>
+                </a:solidFill>
+                <a:latin typeface="Cambria" pitchFamily="34" charset="0"/>
+                <a:ea typeface="Cambria" pitchFamily="34" charset="-122"/>
+                <a:cs typeface="Cambria" pitchFamily="34" charset="-120"/>
+              </a:rPr>
+              <a:t>Shopify — avatar merch</a:t>
+            </a:r>
+            <a:endParaRPr lang="en-US" sz="1150" dirty="0"/>
+          </a:p>
+        </p:txBody>
+      </p:sp>
+      <p:sp>
+        <p:nvSpPr>
+          <p:cNvPr id="50" name="Text 48"/>
+          <p:cNvSpPr/>
+          <p:nvPr/>
+        </p:nvSpPr>
+        <p:spPr>
+          <a:xfrm>
+            <a:off x="2852928" y="4718304"/>
+            <a:ext cx="640080" cy="201168"/>
+          </a:xfrm>
+          <a:prstGeom prst="rect">
+            <a:avLst/>
+          </a:prstGeom>
+          <a:noFill/>
+          <a:ln/>
+        </p:spPr>
+        <p:txBody>
+          <a:bodyPr wrap="square" lIns="0" tIns="0" rIns="0" bIns="0" rtlCol="0" anchor="ctr"/>
+          <a:lstStyle/>
+          <a:p>
+            <a:pPr algn="ctr" indent="0" marL="0">
+              <a:buNone/>
+            </a:pPr>
+            <a:r>
+              <a:rPr lang="en-US" sz="750" b="1" dirty="0">
+                <a:solidFill>
+                  <a:srgbClr val="7A7291"/>
+                </a:solidFill>
+                <a:latin typeface="Calibri" pitchFamily="34" charset="0"/>
+                <a:ea typeface="Calibri" pitchFamily="34" charset="-122"/>
+                <a:cs typeface="Calibri" pitchFamily="34" charset="-120"/>
+              </a:rPr>
+              <a:t>Year 2</a:t>
+            </a:r>
+            <a:endParaRPr lang="en-US" sz="750" dirty="0"/>
+          </a:p>
+        </p:txBody>
+      </p:sp>
+      <p:sp>
+        <p:nvSpPr>
+          <p:cNvPr id="51" name="Text 49"/>
+          <p:cNvSpPr/>
+          <p:nvPr/>
+        </p:nvSpPr>
+        <p:spPr>
+          <a:xfrm>
+            <a:off x="950976" y="4919472"/>
+            <a:ext cx="2514600" cy="347472"/>
+          </a:xfrm>
+          <a:prstGeom prst="rect">
+            <a:avLst/>
+          </a:prstGeom>
+          <a:noFill/>
+          <a:ln/>
+        </p:spPr>
+        <p:txBody>
+          <a:bodyPr wrap="square" lIns="0" tIns="0" rIns="0" bIns="0" rtlCol="0" anchor="ctr"/>
+          <a:lstStyle/>
+          <a:p>
+            <a:pPr indent="0" marL="0">
+              <a:lnSpc>
+                <a:spcPts val="900"/>
+              </a:lnSpc>
+              <a:buNone/>
+            </a:pPr>
+            <a:r>
+              <a:rPr lang="en-US" sz="750" dirty="0">
+                <a:solidFill>
+                  <a:srgbClr val="7A7291"/>
+                </a:solidFill>
+                <a:latin typeface="Calibri" pitchFamily="34" charset="0"/>
+                <a:ea typeface="Calibri" pitchFamily="34" charset="-122"/>
+                <a:cs typeface="Calibri" pitchFamily="34" charset="-120"/>
+              </a:rPr>
+              <a:t>217 painted avatars already exist. 2,000 orders a year at a $32 average basket.</a:t>
+            </a:r>
+            <a:endParaRPr lang="en-US" sz="750" dirty="0"/>
+          </a:p>
+        </p:txBody>
+      </p:sp>
+      <p:sp>
+        <p:nvSpPr>
+          <p:cNvPr id="52" name="Text 50"/>
+          <p:cNvSpPr/>
+          <p:nvPr/>
+        </p:nvSpPr>
+        <p:spPr>
+          <a:xfrm>
+            <a:off x="3566160" y="4736592"/>
+            <a:ext cx="914400" cy="493776"/>
+          </a:xfrm>
+          <a:prstGeom prst="rect">
+            <a:avLst/>
+          </a:prstGeom>
+          <a:noFill/>
+          <a:ln/>
+        </p:spPr>
+        <p:txBody>
+          <a:bodyPr wrap="square" lIns="0" tIns="0" rIns="0" bIns="0" rtlCol="0" anchor="ctr"/>
+          <a:lstStyle/>
+          <a:p>
+            <a:pPr algn="r" indent="0" marL="0">
+              <a:buNone/>
+            </a:pPr>
+            <a:r>
+              <a:rPr lang="en-US" sz="1500" b="1" dirty="0">
+                <a:solidFill>
+                  <a:srgbClr val="F0B429"/>
+                </a:solidFill>
+                <a:latin typeface="Cambria" pitchFamily="34" charset="0"/>
+                <a:ea typeface="Cambria" pitchFamily="34" charset="-122"/>
+                <a:cs typeface="Cambria" pitchFamily="34" charset="-120"/>
+              </a:rPr>
+              <a:t>$65k</a:t>
+            </a:r>
+            <a:endParaRPr lang="en-US" sz="1500" dirty="0"/>
+          </a:p>
+        </p:txBody>
+      </p:sp>
+      <p:sp>
+        <p:nvSpPr>
+          <p:cNvPr id="53" name="Text 51"/>
+          <p:cNvSpPr/>
+          <p:nvPr/>
+        </p:nvSpPr>
+        <p:spPr>
+          <a:xfrm>
+            <a:off x="4663440" y="4736592"/>
+            <a:ext cx="4663440" cy="512064"/>
+          </a:xfrm>
+          <a:prstGeom prst="rect">
+            <a:avLst/>
+          </a:prstGeom>
+          <a:noFill/>
+          <a:ln/>
+        </p:spPr>
+        <p:txBody>
+          <a:bodyPr wrap="square" lIns="0" tIns="0" rIns="0" bIns="0" rtlCol="0" anchor="ctr"/>
+          <a:lstStyle/>
+          <a:p>
+            <a:pPr indent="0" marL="0">
+              <a:lnSpc>
+                <a:spcPts val="1050"/>
+              </a:lnSpc>
+              <a:buNone/>
+            </a:pPr>
+            <a:r>
+              <a:rPr lang="en-US" sz="850" dirty="0">
+                <a:solidFill>
+                  <a:srgbClr val="4A4360"/>
+                </a:solidFill>
+                <a:latin typeface="Calibri" pitchFamily="34" charset="0"/>
+                <a:ea typeface="Calibri" pitchFamily="34" charset="-122"/>
+                <a:cs typeface="Calibri" pitchFamily="34" charset="-120"/>
+              </a:rPr>
+              <a:t>Store plus print-on-demand for tees and posters is cheap. Plushies are the expensive half: a real minimum order, sizes, returns.</a:t>
+            </a:r>
+            <a:endParaRPr lang="en-US" sz="850" dirty="0"/>
+          </a:p>
+        </p:txBody>
+      </p:sp>
+      <p:sp>
+        <p:nvSpPr>
+          <p:cNvPr id="54" name="Text 52"/>
+          <p:cNvSpPr/>
+          <p:nvPr/>
+        </p:nvSpPr>
+        <p:spPr>
+          <a:xfrm>
+            <a:off x="9464040" y="4736592"/>
+            <a:ext cx="914400" cy="493776"/>
+          </a:xfrm>
+          <a:prstGeom prst="rect">
+            <a:avLst/>
+          </a:prstGeom>
+          <a:noFill/>
+          <a:ln/>
+        </p:spPr>
+        <p:txBody>
+          <a:bodyPr wrap="square" lIns="0" tIns="0" rIns="0" bIns="0" rtlCol="0" anchor="ctr"/>
+          <a:lstStyle/>
+          <a:p>
+            <a:pPr algn="r" indent="0" marL="0">
+              <a:buNone/>
+            </a:pPr>
+            <a:r>
+              <a:rPr lang="en-US" sz="1100" dirty="0">
+                <a:solidFill>
+                  <a:srgbClr val="4A4360"/>
+                </a:solidFill>
+                <a:latin typeface="Calibri" pitchFamily="34" charset="0"/>
+                <a:ea typeface="Calibri" pitchFamily="34" charset="-122"/>
+                <a:cs typeface="Calibri" pitchFamily="34" charset="-120"/>
+              </a:rPr>
+              <a:t>$16k</a:t>
+            </a:r>
+            <a:endParaRPr lang="en-US" sz="1100" dirty="0"/>
+          </a:p>
+        </p:txBody>
+      </p:sp>
+      <p:sp>
+        <p:nvSpPr>
+          <p:cNvPr id="55" name="Shape 53"/>
+          <p:cNvSpPr/>
+          <p:nvPr/>
+        </p:nvSpPr>
+        <p:spPr>
+          <a:xfrm>
+            <a:off x="10515600" y="4855464"/>
+            <a:ext cx="868680" cy="256032"/>
+          </a:xfrm>
+          <a:prstGeom prst="roundRect">
+            <a:avLst>
+              <a:gd name="adj" fmla="val 50000"/>
+            </a:avLst>
+          </a:prstGeom>
+          <a:solidFill>
+            <a:srgbClr val="F0B429"/>
+          </a:solidFill>
+          <a:ln/>
+        </p:spPr>
+      </p:sp>
+      <p:sp>
+        <p:nvSpPr>
+          <p:cNvPr id="56" name="Text 54"/>
+          <p:cNvSpPr/>
+          <p:nvPr/>
+        </p:nvSpPr>
+        <p:spPr>
+          <a:xfrm>
+            <a:off x="10515600" y="4855464"/>
+            <a:ext cx="868680" cy="256032"/>
+          </a:xfrm>
+          <a:prstGeom prst="rect">
+            <a:avLst/>
+          </a:prstGeom>
+          <a:noFill/>
+          <a:ln/>
+        </p:spPr>
+        <p:txBody>
+          <a:bodyPr wrap="square" lIns="0" tIns="0" rIns="0" bIns="0" rtlCol="0" anchor="ctr"/>
+          <a:lstStyle/>
+          <a:p>
+            <a:pPr algn="ctr" indent="0" marL="0">
+              <a:buNone/>
+            </a:pPr>
+            <a:r>
+              <a:rPr lang="en-US" sz="900" b="1" dirty="0">
+                <a:solidFill>
+                  <a:srgbClr val="241E33"/>
+                </a:solidFill>
+                <a:latin typeface="Calibri" pitchFamily="34" charset="0"/>
+                <a:ea typeface="Calibri" pitchFamily="34" charset="-122"/>
+                <a:cs typeface="Calibri" pitchFamily="34" charset="-120"/>
+              </a:rPr>
+              <a:t>4×</a:t>
+            </a:r>
+            <a:endParaRPr lang="en-US" sz="900" dirty="0"/>
+          </a:p>
+        </p:txBody>
+      </p:sp>
+      <p:sp>
+        <p:nvSpPr>
+          <p:cNvPr id="57" name="Shape 55"/>
+          <p:cNvSpPr/>
+          <p:nvPr/>
+        </p:nvSpPr>
+        <p:spPr>
+          <a:xfrm rot="5400000">
+            <a:off x="640080" y="5431536"/>
+            <a:ext cx="219456" cy="219456"/>
+          </a:xfrm>
+          <a:prstGeom prst="hexagon">
+            <a:avLst/>
+          </a:prstGeom>
+          <a:solidFill>
+            <a:srgbClr val="C4453C"/>
+          </a:solidFill>
+          <a:ln/>
+        </p:spPr>
+      </p:sp>
+      <p:sp>
+        <p:nvSpPr>
+          <p:cNvPr id="58" name="Text 56"/>
+          <p:cNvSpPr/>
+          <p:nvPr/>
+        </p:nvSpPr>
+        <p:spPr>
+          <a:xfrm>
+            <a:off x="950976" y="5321808"/>
+            <a:ext cx="1874520" cy="237744"/>
+          </a:xfrm>
+          <a:prstGeom prst="rect">
+            <a:avLst/>
+          </a:prstGeom>
+          <a:noFill/>
+          <a:ln/>
+        </p:spPr>
+        <p:txBody>
+          <a:bodyPr wrap="square" lIns="0" tIns="0" rIns="0" bIns="0" rtlCol="0" anchor="ctr"/>
+          <a:lstStyle/>
+          <a:p>
+            <a:pPr indent="0" marL="0">
+              <a:buNone/>
+            </a:pPr>
+            <a:r>
+              <a:rPr lang="en-US" sz="1150" b="1" dirty="0">
+                <a:solidFill>
+                  <a:srgbClr val="241E33"/>
+                </a:solidFill>
+                <a:latin typeface="Cambria" pitchFamily="34" charset="0"/>
+                <a:ea typeface="Cambria" pitchFamily="34" charset="-122"/>
+                <a:cs typeface="Cambria" pitchFamily="34" charset="-120"/>
+              </a:rPr>
+              <a:t>School districts</a:t>
+            </a:r>
+            <a:endParaRPr lang="en-US" sz="1150" dirty="0"/>
+          </a:p>
+        </p:txBody>
+      </p:sp>
+      <p:sp>
+        <p:nvSpPr>
+          <p:cNvPr id="59" name="Text 57"/>
+          <p:cNvSpPr/>
+          <p:nvPr/>
+        </p:nvSpPr>
+        <p:spPr>
+          <a:xfrm>
+            <a:off x="2852928" y="5340096"/>
+            <a:ext cx="640080" cy="201168"/>
+          </a:xfrm>
+          <a:prstGeom prst="rect">
+            <a:avLst/>
+          </a:prstGeom>
+          <a:noFill/>
+          <a:ln/>
+        </p:spPr>
+        <p:txBody>
+          <a:bodyPr wrap="square" lIns="0" tIns="0" rIns="0" bIns="0" rtlCol="0" anchor="ctr"/>
+          <a:lstStyle/>
+          <a:p>
+            <a:pPr algn="ctr" indent="0" marL="0">
+              <a:buNone/>
+            </a:pPr>
+            <a:r>
+              <a:rPr lang="en-US" sz="750" b="1" dirty="0">
+                <a:solidFill>
+                  <a:srgbClr val="7A7291"/>
+                </a:solidFill>
+                <a:latin typeface="Calibri" pitchFamily="34" charset="0"/>
+                <a:ea typeface="Calibri" pitchFamily="34" charset="-122"/>
+                <a:cs typeface="Calibri" pitchFamily="34" charset="-120"/>
+              </a:rPr>
+              <a:t>Year 3</a:t>
+            </a:r>
+            <a:endParaRPr lang="en-US" sz="750" dirty="0"/>
+          </a:p>
+        </p:txBody>
+      </p:sp>
+      <p:sp>
+        <p:nvSpPr>
+          <p:cNvPr id="60" name="Text 58"/>
+          <p:cNvSpPr/>
+          <p:nvPr/>
+        </p:nvSpPr>
+        <p:spPr>
+          <a:xfrm>
+            <a:off x="950976" y="5541264"/>
+            <a:ext cx="2514600" cy="347472"/>
+          </a:xfrm>
+          <a:prstGeom prst="rect">
+            <a:avLst/>
+          </a:prstGeom>
+          <a:noFill/>
+          <a:ln/>
+        </p:spPr>
+        <p:txBody>
+          <a:bodyPr wrap="square" lIns="0" tIns="0" rIns="0" bIns="0" rtlCol="0" anchor="ctr"/>
+          <a:lstStyle/>
+          <a:p>
+            <a:pPr indent="0" marL="0">
+              <a:lnSpc>
+                <a:spcPts val="900"/>
+              </a:lnSpc>
+              <a:buNone/>
+            </a:pPr>
+            <a:r>
+              <a:rPr lang="en-US" sz="750" dirty="0">
+                <a:solidFill>
+                  <a:srgbClr val="7A7291"/>
+                </a:solidFill>
+                <a:latin typeface="Calibri" pitchFamily="34" charset="0"/>
+                <a:ea typeface="Calibri" pitchFamily="34" charset="-122"/>
+                <a:cs typeface="Calibri" pitchFamily="34" charset="-120"/>
+              </a:rPr>
+              <a:t>Supplemental literacy licensing. 3 districts × ~10,000 students in band × $4 per student per year.</a:t>
+            </a:r>
+            <a:endParaRPr lang="en-US" sz="750" dirty="0"/>
+          </a:p>
+        </p:txBody>
+      </p:sp>
+      <p:sp>
+        <p:nvSpPr>
+          <p:cNvPr id="61" name="Text 59"/>
+          <p:cNvSpPr/>
+          <p:nvPr/>
+        </p:nvSpPr>
+        <p:spPr>
+          <a:xfrm>
+            <a:off x="3566160" y="5358384"/>
+            <a:ext cx="914400" cy="493776"/>
+          </a:xfrm>
+          <a:prstGeom prst="rect">
+            <a:avLst/>
+          </a:prstGeom>
+          <a:noFill/>
+          <a:ln/>
+        </p:spPr>
+        <p:txBody>
+          <a:bodyPr wrap="square" lIns="0" tIns="0" rIns="0" bIns="0" rtlCol="0" anchor="ctr"/>
+          <a:lstStyle/>
+          <a:p>
+            <a:pPr algn="r" indent="0" marL="0">
+              <a:buNone/>
+            </a:pPr>
+            <a:r>
+              <a:rPr lang="en-US" sz="1500" b="1" dirty="0">
+                <a:solidFill>
+                  <a:srgbClr val="C4453C"/>
+                </a:solidFill>
+                <a:latin typeface="Cambria" pitchFamily="34" charset="0"/>
+                <a:ea typeface="Cambria" pitchFamily="34" charset="-122"/>
+                <a:cs typeface="Cambria" pitchFamily="34" charset="-120"/>
+              </a:rPr>
+              <a:t>$120k</a:t>
+            </a:r>
+            <a:endParaRPr lang="en-US" sz="1500" dirty="0"/>
+          </a:p>
+        </p:txBody>
+      </p:sp>
+      <p:sp>
+        <p:nvSpPr>
+          <p:cNvPr id="62" name="Text 60"/>
+          <p:cNvSpPr/>
+          <p:nvPr/>
+        </p:nvSpPr>
+        <p:spPr>
+          <a:xfrm>
+            <a:off x="4663440" y="5358384"/>
+            <a:ext cx="4663440" cy="512064"/>
+          </a:xfrm>
+          <a:prstGeom prst="rect">
+            <a:avLst/>
+          </a:prstGeom>
+          <a:noFill/>
+          <a:ln/>
+        </p:spPr>
+        <p:txBody>
+          <a:bodyPr wrap="square" lIns="0" tIns="0" rIns="0" bIns="0" rtlCol="0" anchor="ctr"/>
+          <a:lstStyle/>
+          <a:p>
+            <a:pPr indent="0" marL="0">
+              <a:lnSpc>
+                <a:spcPts val="1050"/>
+              </a:lnSpc>
+              <a:buNone/>
+            </a:pPr>
+            <a:r>
+              <a:rPr lang="en-US" sz="850" dirty="0">
+                <a:solidFill>
+                  <a:srgbClr val="4A4360"/>
+                </a:solidFill>
+                <a:latin typeface="Calibri" pitchFamily="34" charset="0"/>
+                <a:ea typeface="Calibri" pitchFamily="34" charset="-122"/>
+                <a:cs typeface="Calibri" pitchFamily="34" charset="-120"/>
+              </a:rPr>
+              <a:t>COPPA/FERPA compliance, an SDPC data agreement, Clever or ClassLink rostering, a teacher dashboard, and one pilot with real outcome data.</a:t>
+            </a:r>
+            <a:endParaRPr lang="en-US" sz="850" dirty="0"/>
+          </a:p>
+        </p:txBody>
+      </p:sp>
+      <p:sp>
+        <p:nvSpPr>
+          <p:cNvPr id="63" name="Text 61"/>
+          <p:cNvSpPr/>
+          <p:nvPr/>
+        </p:nvSpPr>
+        <p:spPr>
+          <a:xfrm>
+            <a:off x="9464040" y="5358384"/>
+            <a:ext cx="914400" cy="493776"/>
+          </a:xfrm>
+          <a:prstGeom prst="rect">
+            <a:avLst/>
+          </a:prstGeom>
+          <a:noFill/>
+          <a:ln/>
+        </p:spPr>
+        <p:txBody>
+          <a:bodyPr wrap="square" lIns="0" tIns="0" rIns="0" bIns="0" rtlCol="0" anchor="ctr"/>
+          <a:lstStyle/>
+          <a:p>
+            <a:pPr algn="r" indent="0" marL="0">
+              <a:buNone/>
+            </a:pPr>
+            <a:r>
+              <a:rPr lang="en-US" sz="1100" dirty="0">
+                <a:solidFill>
+                  <a:srgbClr val="4A4360"/>
+                </a:solidFill>
+                <a:latin typeface="Calibri" pitchFamily="34" charset="0"/>
+                <a:ea typeface="Calibri" pitchFamily="34" charset="-122"/>
+                <a:cs typeface="Calibri" pitchFamily="34" charset="-120"/>
+              </a:rPr>
+              <a:t>$35k</a:t>
+            </a:r>
+            <a:endParaRPr lang="en-US" sz="1100" dirty="0"/>
+          </a:p>
+        </p:txBody>
+      </p:sp>
+      <p:sp>
+        <p:nvSpPr>
+          <p:cNvPr id="64" name="Shape 62"/>
+          <p:cNvSpPr/>
+          <p:nvPr/>
+        </p:nvSpPr>
+        <p:spPr>
+          <a:xfrm>
+            <a:off x="10515600" y="5477256"/>
+            <a:ext cx="868680" cy="256032"/>
+          </a:xfrm>
+          <a:prstGeom prst="roundRect">
+            <a:avLst>
+              <a:gd name="adj" fmla="val 50000"/>
+            </a:avLst>
+          </a:prstGeom>
+          <a:solidFill>
+            <a:srgbClr val="C4453C"/>
+          </a:solidFill>
+          <a:ln/>
+        </p:spPr>
+      </p:sp>
+      <p:sp>
+        <p:nvSpPr>
+          <p:cNvPr id="65" name="Text 63"/>
+          <p:cNvSpPr/>
+          <p:nvPr/>
+        </p:nvSpPr>
+        <p:spPr>
+          <a:xfrm>
+            <a:off x="10515600" y="5477256"/>
+            <a:ext cx="868680" cy="256032"/>
+          </a:xfrm>
+          <a:prstGeom prst="rect">
+            <a:avLst/>
+          </a:prstGeom>
+          <a:noFill/>
+          <a:ln/>
+        </p:spPr>
+        <p:txBody>
+          <a:bodyPr wrap="square" lIns="0" tIns="0" rIns="0" bIns="0" rtlCol="0" anchor="ctr"/>
+          <a:lstStyle/>
+          <a:p>
+            <a:pPr algn="ctr" indent="0" marL="0">
+              <a:buNone/>
+            </a:pPr>
+            <a:r>
+              <a:rPr lang="en-US" sz="900" b="1" dirty="0">
+                <a:solidFill>
+                  <a:srgbClr val="FFFFFF"/>
+                </a:solidFill>
+                <a:latin typeface="Calibri" pitchFamily="34" charset="0"/>
+                <a:ea typeface="Calibri" pitchFamily="34" charset="-122"/>
+                <a:cs typeface="Calibri" pitchFamily="34" charset="-120"/>
+              </a:rPr>
+              <a:t>3×</a:t>
+            </a:r>
+            <a:endParaRPr lang="en-US" sz="900" dirty="0"/>
+          </a:p>
+        </p:txBody>
+      </p:sp>
+      <p:sp>
+        <p:nvSpPr>
+          <p:cNvPr id="66" name="Shape 64"/>
+          <p:cNvSpPr/>
+          <p:nvPr/>
+        </p:nvSpPr>
+        <p:spPr>
+          <a:xfrm>
+            <a:off x="512064" y="5934456"/>
+            <a:ext cx="10954512" cy="512064"/>
+          </a:xfrm>
+          <a:prstGeom prst="roundRect">
+            <a:avLst>
+              <a:gd name="adj" fmla="val 16071"/>
+            </a:avLst>
+          </a:prstGeom>
+          <a:solidFill>
+            <a:srgbClr val="241E33"/>
+          </a:solidFill>
+          <a:ln/>
+        </p:spPr>
+      </p:sp>
+      <p:sp>
+        <p:nvSpPr>
+          <p:cNvPr id="67" name="Text 65"/>
+          <p:cNvSpPr/>
+          <p:nvPr/>
+        </p:nvSpPr>
+        <p:spPr>
+          <a:xfrm>
+            <a:off x="950976" y="5980176"/>
+            <a:ext cx="2514600" cy="420624"/>
+          </a:xfrm>
+          <a:prstGeom prst="rect">
+            <a:avLst/>
+          </a:prstGeom>
+          <a:noFill/>
+          <a:ln/>
+        </p:spPr>
+        <p:txBody>
+          <a:bodyPr wrap="square" lIns="0" tIns="0" rIns="0" bIns="0" rtlCol="0" anchor="ctr"/>
+          <a:lstStyle/>
+          <a:p>
+            <a:pPr indent="0" marL="0">
+              <a:buNone/>
+            </a:pPr>
+            <a:r>
+              <a:rPr lang="en-US" sz="1250" b="1" dirty="0">
+                <a:solidFill>
+                  <a:srgbClr val="FFFFFF"/>
+                </a:solidFill>
+                <a:latin typeface="Cambria" pitchFamily="34" charset="0"/>
+                <a:ea typeface="Cambria" pitchFamily="34" charset="-122"/>
+                <a:cs typeface="Cambria" pitchFamily="34" charset="-120"/>
+              </a:rPr>
+              <a:t>All six, fully open</a:t>
+            </a:r>
+            <a:endParaRPr lang="en-US" sz="1250" dirty="0"/>
+          </a:p>
+        </p:txBody>
+      </p:sp>
+      <p:sp>
+        <p:nvSpPr>
+          <p:cNvPr id="68" name="Text 66"/>
+          <p:cNvSpPr/>
+          <p:nvPr/>
+        </p:nvSpPr>
+        <p:spPr>
+          <a:xfrm>
+            <a:off x="3566160" y="5980176"/>
+            <a:ext cx="914400" cy="420624"/>
+          </a:xfrm>
+          <a:prstGeom prst="rect">
+            <a:avLst/>
+          </a:prstGeom>
+          <a:noFill/>
+          <a:ln/>
+        </p:spPr>
+        <p:txBody>
+          <a:bodyPr wrap="square" lIns="0" tIns="0" rIns="0" bIns="0" rtlCol="0" anchor="ctr"/>
+          <a:lstStyle/>
+          <a:p>
+            <a:pPr algn="r" indent="0" marL="0">
+              <a:buNone/>
+            </a:pPr>
+            <a:r>
+              <a:rPr lang="en-US" sz="1500" b="1" dirty="0">
+                <a:solidFill>
+                  <a:srgbClr val="F0B429"/>
+                </a:solidFill>
+                <a:latin typeface="Cambria" pitchFamily="34" charset="0"/>
+                <a:ea typeface="Cambria" pitchFamily="34" charset="-122"/>
+                <a:cs typeface="Cambria" pitchFamily="34" charset="-120"/>
+              </a:rPr>
+              <a:t>$780k</a:t>
+            </a:r>
+            <a:endParaRPr lang="en-US" sz="1500" dirty="0"/>
+          </a:p>
+        </p:txBody>
+      </p:sp>
+      <p:sp>
+        <p:nvSpPr>
+          <p:cNvPr id="69" name="Text 67"/>
+          <p:cNvSpPr/>
+          <p:nvPr/>
+        </p:nvSpPr>
+        <p:spPr>
+          <a:xfrm>
+            <a:off x="4663440" y="5980176"/>
+            <a:ext cx="4663440" cy="420624"/>
+          </a:xfrm>
+          <a:prstGeom prst="rect">
+            <a:avLst/>
+          </a:prstGeom>
+          <a:noFill/>
+          <a:ln/>
+        </p:spPr>
+        <p:txBody>
+          <a:bodyPr wrap="square" lIns="0" tIns="0" rIns="0" bIns="0" rtlCol="0" anchor="ctr"/>
+          <a:lstStyle/>
+          <a:p>
+            <a:pPr indent="0" marL="0">
+              <a:buNone/>
+            </a:pPr>
+            <a:r>
+              <a:rPr lang="en-US" sz="850" dirty="0">
+                <a:solidFill>
+                  <a:srgbClr val="E3DCF2"/>
+                </a:solidFill>
+                <a:latin typeface="Calibri" pitchFamily="34" charset="0"/>
+                <a:ea typeface="Calibri" pitchFamily="34" charset="-122"/>
+                <a:cs typeface="Calibri" pitchFamily="34" charset="-120"/>
+              </a:rPr>
+              <a:t>a year by Year 4 — roughly half of base-case Year 4 revenue, added to a business that already pays for itself without any of it.</a:t>
+            </a:r>
+            <a:endParaRPr lang="en-US" sz="850" dirty="0"/>
+          </a:p>
+        </p:txBody>
+      </p:sp>
+      <p:sp>
+        <p:nvSpPr>
+          <p:cNvPr id="70" name="Text 68"/>
+          <p:cNvSpPr/>
+          <p:nvPr/>
+        </p:nvSpPr>
+        <p:spPr>
+          <a:xfrm>
+            <a:off x="9464040" y="5980176"/>
+            <a:ext cx="914400" cy="420624"/>
+          </a:xfrm>
+          <a:prstGeom prst="rect">
+            <a:avLst/>
+          </a:prstGeom>
+          <a:noFill/>
+          <a:ln/>
+        </p:spPr>
+        <p:txBody>
+          <a:bodyPr wrap="square" lIns="0" tIns="0" rIns="0" bIns="0" rtlCol="0" anchor="ctr"/>
+          <a:lstStyle/>
+          <a:p>
+            <a:pPr algn="r" indent="0" marL="0">
+              <a:buNone/>
+            </a:pPr>
+            <a:r>
+              <a:rPr lang="en-US" sz="1100" b="1" dirty="0">
+                <a:solidFill>
+                  <a:srgbClr val="FFFFFF"/>
+                </a:solidFill>
+                <a:latin typeface="Calibri" pitchFamily="34" charset="0"/>
+                <a:ea typeface="Calibri" pitchFamily="34" charset="-122"/>
+                <a:cs typeface="Calibri" pitchFamily="34" charset="-120"/>
+              </a:rPr>
+              <a:t>$84k</a:t>
+            </a:r>
+            <a:endParaRPr lang="en-US" sz="1100" dirty="0"/>
+          </a:p>
+        </p:txBody>
+      </p:sp>
+      <p:sp>
+        <p:nvSpPr>
+          <p:cNvPr id="71" name="Text 69"/>
+          <p:cNvSpPr/>
+          <p:nvPr/>
+        </p:nvSpPr>
+        <p:spPr>
+          <a:xfrm>
+            <a:off x="10515600" y="5980176"/>
+            <a:ext cx="868680" cy="420624"/>
+          </a:xfrm>
+          <a:prstGeom prst="rect">
+            <a:avLst/>
+          </a:prstGeom>
+          <a:noFill/>
+          <a:ln/>
+        </p:spPr>
+        <p:txBody>
+          <a:bodyPr wrap="square" lIns="0" tIns="0" rIns="0" bIns="0" rtlCol="0" anchor="ctr"/>
+          <a:lstStyle/>
+          <a:p>
+            <a:pPr algn="ctr" indent="0" marL="0">
+              <a:buNone/>
+            </a:pPr>
+            <a:r>
+              <a:rPr lang="en-US" sz="1300" b="1" dirty="0">
+                <a:solidFill>
+                  <a:srgbClr val="F0B429"/>
+                </a:solidFill>
+                <a:latin typeface="Cambria" pitchFamily="34" charset="0"/>
+                <a:ea typeface="Cambria" pitchFamily="34" charset="-122"/>
+                <a:cs typeface="Cambria" pitchFamily="34" charset="-120"/>
+              </a:rPr>
+              <a:t>9×</a:t>
+            </a:r>
+            <a:endParaRPr lang="en-US" sz="1300" dirty="0"/>
+          </a:p>
+        </p:txBody>
+      </p:sp>
+      <p:sp>
+        <p:nvSpPr>
+          <p:cNvPr id="72" name="Shape 70"/>
+          <p:cNvSpPr/>
+          <p:nvPr/>
+        </p:nvSpPr>
+        <p:spPr>
+          <a:xfrm>
+            <a:off x="640080" y="6419088"/>
+            <a:ext cx="10607040" cy="384048"/>
+          </a:xfrm>
+          <a:prstGeom prst="roundRect">
+            <a:avLst>
+              <a:gd name="adj" fmla="val 23810"/>
+            </a:avLst>
+          </a:prstGeom>
+          <a:solidFill>
+            <a:srgbClr val="E8F4EC"/>
+          </a:solidFill>
+          <a:ln/>
+        </p:spPr>
+      </p:sp>
+      <p:sp>
+        <p:nvSpPr>
+          <p:cNvPr id="73" name="Text 71"/>
+          <p:cNvSpPr/>
+          <p:nvPr/>
+        </p:nvSpPr>
+        <p:spPr>
+          <a:xfrm>
+            <a:off x="877824" y="6419088"/>
+            <a:ext cx="10149840" cy="384048"/>
+          </a:xfrm>
+          <a:prstGeom prst="rect">
+            <a:avLst/>
+          </a:prstGeom>
+          <a:noFill/>
+          <a:ln/>
+        </p:spPr>
+        <p:txBody>
+          <a:bodyPr wrap="square" lIns="0" tIns="0" rIns="0" bIns="0" rtlCol="0" anchor="ctr"/>
+          <a:lstStyle/>
+          <a:p>
+            <a:pPr indent="0" marL="0">
+              <a:lnSpc>
+                <a:spcPts val="1100"/>
+              </a:lnSpc>
+              <a:buNone/>
+            </a:pPr>
+            <a:r>
+              <a:rPr lang="en-US" sz="900" b="1" dirty="0">
+                <a:solidFill>
+                  <a:srgbClr val="1F4A33"/>
+                </a:solidFill>
+                <a:latin typeface="Calibri" pitchFamily="34" charset="0"/>
+                <a:ea typeface="Calibri" pitchFamily="34" charset="-122"/>
+                <a:cs typeface="Calibri" pitchFamily="34" charset="-120"/>
+              </a:rPr>
+              <a:t>The rule these have to clear:  </a:t>
+            </a:r>
+            <a:pPr indent="0" marL="0">
+              <a:lnSpc>
+                <a:spcPts val="1100"/>
+              </a:lnSpc>
+              <a:buNone/>
+            </a:pPr>
+            <a:r>
+              <a:rPr lang="en-US" sz="900" dirty="0">
+                <a:solidFill>
+                  <a:srgbClr val="1F4A33"/>
+                </a:solidFill>
+                <a:latin typeface="Calibri" pitchFamily="34" charset="0"/>
+                <a:ea typeface="Calibri" pitchFamily="34" charset="-122"/>
+                <a:cs typeface="Calibri" pitchFamily="34" charset="-120"/>
+              </a:rPr>
+              <a:t>an unlock cost is paid out of the PRIOR year’s profit, never out of a budget. $85k opens all six — which the base case cannot afford until Year 3, so the top two go first and fund the rest. That ordering is why school districts, the most impressive line on this slide, is also the last one we should touch.</a:t>
+            </a:r>
+            <a:endParaRPr lang="en-US" sz="900" dirty="0"/>
+          </a:p>
+        </p:txBody>
+      </p:sp>
+    </p:spTree>
+  </p:cSld>
+  <p:clrMapOvr>
+    <a:masterClrMapping/>
+  </p:clrMapOvr>
+</p:sld>
+</file>
+
+<file path=ppt/slides/slide42.xml><?xml version="1.0" encoding="utf-8"?>
+<p:sld xmlns:a="http://schemas.openxmlformats.org/drawingml/2006/main" xmlns:r="http://schemas.openxmlformats.org/officeDocument/2006/relationships" xmlns:p="http://schemas.openxmlformats.org/presentationml/2006/main">
+  <p:cSld name="Slide 42">
+    <p:bg>
+      <p:bgPr>
+        <a:solidFill>
+          <a:srgbClr val="FFFFFF"/>
+        </a:solidFill>
+      </p:bgPr>
+    </p:bg>
+    <p:spTree>
+      <p:nvGrpSpPr>
+        <p:cNvPr id="1" name=""/>
+        <p:cNvGrpSpPr/>
+        <p:nvPr/>
+      </p:nvGrpSpPr>
+      <p:grpSpPr>
+        <a:xfrm>
+          <a:off x="0" y="0"/>
+          <a:ext cx="0" cy="0"/>
+          <a:chOff x="0" y="0"/>
+          <a:chExt cx="0" cy="0"/>
+        </a:xfrm>
+      </p:grpSpPr>
+      <p:sp>
+        <p:nvSpPr>
+          <p:cNvPr id="2" name="Text 0"/>
+          <p:cNvSpPr/>
+          <p:nvPr/>
+        </p:nvSpPr>
+        <p:spPr>
+          <a:xfrm>
+            <a:off x="640080" y="402336"/>
+            <a:ext cx="7315200" cy="256032"/>
+          </a:xfrm>
+          <a:prstGeom prst="rect">
+            <a:avLst/>
+          </a:prstGeom>
+          <a:noFill/>
+          <a:ln/>
+        </p:spPr>
+        <p:txBody>
+          <a:bodyPr wrap="square" lIns="0" tIns="0" rIns="0" bIns="0" rtlCol="0" anchor="ctr"/>
+          <a:lstStyle/>
+          <a:p>
+            <a:pPr indent="0" marL="0">
+              <a:buNone/>
+            </a:pPr>
+            <a:r>
+              <a:rPr lang="en-US" sz="1150" b="1" spc="240" kern="0" dirty="0">
+                <a:solidFill>
+                  <a:srgbClr val="6C4FE0"/>
+                </a:solidFill>
+                <a:latin typeface="Calibri" pitchFamily="34" charset="0"/>
+                <a:ea typeface="Calibri" pitchFamily="34" charset="-122"/>
+                <a:cs typeface="Calibri" pitchFamily="34" charset="-120"/>
+              </a:rPr>
+              <a:t>PARTNERS · NEEDS VERIFICATION</a:t>
+            </a:r>
+            <a:endParaRPr lang="en-US" sz="1150" dirty="0"/>
+          </a:p>
+        </p:txBody>
+      </p:sp>
+      <p:sp>
+        <p:nvSpPr>
+          <p:cNvPr id="3" name="Text 1"/>
+          <p:cNvSpPr/>
+          <p:nvPr/>
+        </p:nvSpPr>
+        <p:spPr>
+          <a:xfrm>
+            <a:off x="640080" y="694944"/>
+            <a:ext cx="10607040" cy="749808"/>
+          </a:xfrm>
+          <a:prstGeom prst="rect">
+            <a:avLst/>
+          </a:prstGeom>
+          <a:noFill/>
+          <a:ln/>
+        </p:spPr>
+        <p:txBody>
+          <a:bodyPr wrap="square" lIns="0" tIns="0" rIns="0" bIns="0" rtlCol="0" anchor="ctr"/>
+          <a:lstStyle/>
+          <a:p>
+            <a:pPr indent="0" marL="0">
+              <a:buNone/>
+            </a:pPr>
+            <a:r>
+              <a:rPr lang="en-US" sz="2900" b="1" dirty="0">
+                <a:solidFill>
+                  <a:srgbClr val="241E33"/>
+                </a:solidFill>
+                <a:latin typeface="Cambria" pitchFamily="34" charset="0"/>
+                <a:ea typeface="Cambria" pitchFamily="34" charset="-122"/>
+                <a:cs typeface="Cambria" pitchFamily="34" charset="-120"/>
+              </a:rPr>
+              <a:t>Who we would actually call</a:t>
+            </a:r>
+            <a:endParaRPr lang="en-US" sz="2900" dirty="0"/>
+          </a:p>
+        </p:txBody>
+      </p:sp>
+      <p:sp>
+        <p:nvSpPr>
+          <p:cNvPr id="4" name="Text 2"/>
+          <p:cNvSpPr/>
+          <p:nvPr/>
+        </p:nvSpPr>
+        <p:spPr>
+          <a:xfrm>
+            <a:off x="640080" y="1408176"/>
+            <a:ext cx="10607040" cy="457200"/>
+          </a:xfrm>
+          <a:prstGeom prst="rect">
+            <a:avLst/>
+          </a:prstGeom>
+          <a:noFill/>
+          <a:ln/>
+        </p:spPr>
+        <p:txBody>
+          <a:bodyPr wrap="square" lIns="0" tIns="0" rIns="0" bIns="0" rtlCol="0" anchor="ctr"/>
+          <a:lstStyle/>
+          <a:p>
+            <a:pPr indent="0" marL="0">
+              <a:lnSpc>
+                <a:spcPts val="1600"/>
+              </a:lnSpc>
+              <a:buNone/>
+            </a:pPr>
+            <a:r>
+              <a:rPr lang="en-US" sz="1350" dirty="0">
+                <a:solidFill>
+                  <a:srgbClr val="7A7291"/>
+                </a:solidFill>
+                <a:latin typeface="Calibri" pitchFamily="34" charset="0"/>
+                <a:ea typeface="Calibri" pitchFamily="34" charset="-122"/>
+                <a:cs typeface="Calibri" pitchFamily="34" charset="-120"/>
+              </a:rPr>
+              <a:t>Four networks that already gather our families in one place, so we rent an audience instead of buying one. The app already ships North South Foundation’s own word lists — we arrive built to their syllabus.</a:t>
+            </a:r>
+            <a:endParaRPr lang="en-US" sz="1350" dirty="0"/>
+          </a:p>
+        </p:txBody>
+      </p:sp>
+      <p:sp>
+        <p:nvSpPr>
+          <p:cNvPr id="5" name="Shape 3"/>
+          <p:cNvSpPr/>
+          <p:nvPr/>
+        </p:nvSpPr>
+        <p:spPr>
+          <a:xfrm>
+            <a:off x="640080" y="1956816"/>
+            <a:ext cx="2523744" cy="2212848"/>
+          </a:xfrm>
+          <a:prstGeom prst="roundRect">
+            <a:avLst>
+              <a:gd name="adj" fmla="val 4959"/>
+            </a:avLst>
+          </a:prstGeom>
+          <a:solidFill>
+            <a:srgbClr val="EFEBF8"/>
+          </a:solidFill>
+          <a:ln/>
+        </p:spPr>
+      </p:sp>
+      <p:sp>
+        <p:nvSpPr>
+          <p:cNvPr id="6" name="Shape 4"/>
+          <p:cNvSpPr/>
+          <p:nvPr/>
+        </p:nvSpPr>
+        <p:spPr>
+          <a:xfrm>
+            <a:off x="640080" y="1956816"/>
+            <a:ext cx="2523744" cy="256032"/>
+          </a:xfrm>
+          <a:prstGeom prst="roundRect">
+            <a:avLst>
+              <a:gd name="adj" fmla="val 42857"/>
+            </a:avLst>
+          </a:prstGeom>
+          <a:solidFill>
+            <a:srgbClr val="178A4C"/>
+          </a:solidFill>
+          <a:ln/>
+        </p:spPr>
+      </p:sp>
+      <p:sp>
+        <p:nvSpPr>
+          <p:cNvPr id="7" name="Text 5"/>
+          <p:cNvSpPr/>
+          <p:nvPr/>
+        </p:nvSpPr>
+        <p:spPr>
+          <a:xfrm>
+            <a:off x="640080" y="1956816"/>
+            <a:ext cx="2523744" cy="256032"/>
+          </a:xfrm>
+          <a:prstGeom prst="rect">
+            <a:avLst/>
+          </a:prstGeom>
+          <a:noFill/>
+          <a:ln/>
+        </p:spPr>
+        <p:txBody>
+          <a:bodyPr wrap="square" lIns="0" tIns="0" rIns="0" bIns="0" rtlCol="0" anchor="ctr"/>
+          <a:lstStyle/>
+          <a:p>
+            <a:pPr algn="ctr" indent="0" marL="0">
+              <a:buNone/>
+            </a:pPr>
+            <a:r>
+              <a:rPr lang="en-US" sz="800" b="1" spc="120" kern="0" dirty="0">
+                <a:solidFill>
+                  <a:srgbClr val="FFFFFF"/>
+                </a:solidFill>
+                <a:latin typeface="Calibri" pitchFamily="34" charset="0"/>
+                <a:ea typeface="Calibri" pitchFamily="34" charset="-122"/>
+                <a:cs typeface="Calibri" pitchFamily="34" charset="-120"/>
+              </a:rPr>
+              <a:t>BEE &amp; DIASPORA</a:t>
+            </a:r>
+            <a:endParaRPr lang="en-US" sz="800" dirty="0"/>
+          </a:p>
+        </p:txBody>
+      </p:sp>
+      <p:sp>
+        <p:nvSpPr>
+          <p:cNvPr id="8" name="Text 6"/>
+          <p:cNvSpPr/>
+          <p:nvPr/>
+        </p:nvSpPr>
+        <p:spPr>
+          <a:xfrm>
+            <a:off x="786384" y="2249424"/>
+            <a:ext cx="2231136" cy="219456"/>
+          </a:xfrm>
+          <a:prstGeom prst="rect">
+            <a:avLst/>
+          </a:prstGeom>
+          <a:noFill/>
+          <a:ln/>
+        </p:spPr>
+        <p:txBody>
+          <a:bodyPr wrap="square" lIns="0" tIns="0" rIns="0" bIns="0" rtlCol="0" anchor="ctr"/>
+          <a:lstStyle/>
+          <a:p>
+            <a:pPr indent="0" marL="0">
+              <a:buNone/>
+            </a:pPr>
+            <a:r>
+              <a:rPr lang="en-US" sz="750" i="1" dirty="0">
+                <a:solidFill>
+                  <a:srgbClr val="7A7291"/>
+                </a:solidFill>
+                <a:latin typeface="Calibri" pitchFamily="34" charset="0"/>
+                <a:ea typeface="Calibri" pitchFamily="34" charset="-122"/>
+                <a:cs typeface="Calibri" pitchFamily="34" charset="-120"/>
+              </a:rPr>
+              <a:t>The warmest room we could walk into</a:t>
+            </a:r>
+            <a:endParaRPr lang="en-US" sz="750" dirty="0"/>
+          </a:p>
+        </p:txBody>
+      </p:sp>
+      <p:sp>
+        <p:nvSpPr>
+          <p:cNvPr id="9" name="Text 7"/>
+          <p:cNvSpPr/>
+          <p:nvPr/>
+        </p:nvSpPr>
+        <p:spPr>
+          <a:xfrm>
+            <a:off x="786384" y="2505456"/>
+            <a:ext cx="2231136" cy="164592"/>
+          </a:xfrm>
+          <a:prstGeom prst="rect">
+            <a:avLst/>
+          </a:prstGeom>
+          <a:noFill/>
+          <a:ln/>
+        </p:spPr>
+        <p:txBody>
+          <a:bodyPr wrap="square" lIns="0" tIns="0" rIns="0" bIns="0" rtlCol="0" anchor="ctr"/>
+          <a:lstStyle/>
+          <a:p>
+            <a:pPr indent="0" marL="0">
+              <a:buNone/>
+            </a:pPr>
+            <a:r>
+              <a:rPr lang="en-US" sz="900" b="1" dirty="0">
+                <a:solidFill>
+                  <a:srgbClr val="241E33"/>
+                </a:solidFill>
+                <a:latin typeface="Cambria" pitchFamily="34" charset="0"/>
+                <a:ea typeface="Cambria" pitchFamily="34" charset="-122"/>
+                <a:cs typeface="Cambria" pitchFamily="34" charset="-120"/>
+              </a:rPr>
+              <a:t>North South Foundation</a:t>
+            </a:r>
+            <a:endParaRPr lang="en-US" sz="900" dirty="0"/>
+          </a:p>
+        </p:txBody>
+      </p:sp>
+      <p:sp>
+        <p:nvSpPr>
+          <p:cNvPr id="10" name="Text 8"/>
+          <p:cNvSpPr/>
+          <p:nvPr/>
+        </p:nvSpPr>
+        <p:spPr>
+          <a:xfrm>
+            <a:off x="786384" y="2651760"/>
+            <a:ext cx="2231136" cy="237744"/>
+          </a:xfrm>
+          <a:prstGeom prst="rect">
+            <a:avLst/>
+          </a:prstGeom>
+          <a:noFill/>
+          <a:ln/>
+        </p:spPr>
+        <p:txBody>
+          <a:bodyPr wrap="square" lIns="0" tIns="0" rIns="0" bIns="0" rtlCol="0" anchor="ctr"/>
+          <a:lstStyle/>
+          <a:p>
+            <a:pPr indent="0" marL="0">
+              <a:lnSpc>
+                <a:spcPts val="850"/>
+              </a:lnSpc>
+              <a:buNone/>
+            </a:pPr>
+            <a:r>
+              <a:rPr lang="en-US" sz="700" dirty="0">
+                <a:solidFill>
+                  <a:srgbClr val="4A4360"/>
+                </a:solidFill>
+                <a:latin typeface="Calibri" pitchFamily="34" charset="0"/>
+                <a:ea typeface="Calibri" pitchFamily="34" charset="-122"/>
+                <a:cs typeface="Calibri" pitchFamily="34" charset="-120"/>
+              </a:rPr>
+              <a:t>~100 US chapters; regional and national contests for Indian-American children</a:t>
+            </a:r>
+            <a:endParaRPr lang="en-US" sz="700" dirty="0"/>
+          </a:p>
+        </p:txBody>
+      </p:sp>
+      <p:sp>
+        <p:nvSpPr>
+          <p:cNvPr id="11" name="Text 9"/>
+          <p:cNvSpPr/>
+          <p:nvPr/>
+        </p:nvSpPr>
+        <p:spPr>
+          <a:xfrm>
+            <a:off x="786384" y="2907792"/>
+            <a:ext cx="2231136" cy="164592"/>
+          </a:xfrm>
+          <a:prstGeom prst="rect">
+            <a:avLst/>
+          </a:prstGeom>
+          <a:noFill/>
+          <a:ln/>
+        </p:spPr>
+        <p:txBody>
+          <a:bodyPr wrap="square" lIns="0" tIns="0" rIns="0" bIns="0" rtlCol="0" anchor="ctr"/>
+          <a:lstStyle/>
+          <a:p>
+            <a:pPr indent="0" marL="0">
+              <a:buNone/>
+            </a:pPr>
+            <a:r>
+              <a:rPr lang="en-US" sz="900" b="1" dirty="0">
+                <a:solidFill>
+                  <a:srgbClr val="241E33"/>
+                </a:solidFill>
+                <a:latin typeface="Cambria" pitchFamily="34" charset="0"/>
+                <a:ea typeface="Cambria" pitchFamily="34" charset="-122"/>
+                <a:cs typeface="Cambria" pitchFamily="34" charset="-120"/>
+              </a:rPr>
+              <a:t>South Asian Spelling Bee</a:t>
+            </a:r>
+            <a:endParaRPr lang="en-US" sz="900" dirty="0"/>
+          </a:p>
+        </p:txBody>
+      </p:sp>
+      <p:sp>
+        <p:nvSpPr>
+          <p:cNvPr id="12" name="Text 10"/>
+          <p:cNvSpPr/>
+          <p:nvPr/>
+        </p:nvSpPr>
+        <p:spPr>
+          <a:xfrm>
+            <a:off x="786384" y="3054096"/>
+            <a:ext cx="2231136" cy="237744"/>
+          </a:xfrm>
+          <a:prstGeom prst="rect">
+            <a:avLst/>
+          </a:prstGeom>
+          <a:noFill/>
+          <a:ln/>
+        </p:spPr>
+        <p:txBody>
+          <a:bodyPr wrap="square" lIns="0" tIns="0" rIns="0" bIns="0" rtlCol="0" anchor="ctr"/>
+          <a:lstStyle/>
+          <a:p>
+            <a:pPr indent="0" marL="0">
+              <a:lnSpc>
+                <a:spcPts val="850"/>
+              </a:lnSpc>
+              <a:buNone/>
+            </a:pPr>
+            <a:r>
+              <a:rPr lang="en-US" sz="700" dirty="0">
+                <a:solidFill>
+                  <a:srgbClr val="4A4360"/>
+                </a:solidFill>
+                <a:latin typeface="Calibri" pitchFamily="34" charset="0"/>
+                <a:ea typeface="Calibri" pitchFamily="34" charset="-122"/>
+                <a:cs typeface="Calibri" pitchFamily="34" charset="-120"/>
+              </a:rPr>
+              <a:t>National competition, exactly our demographic</a:t>
+            </a:r>
+            <a:endParaRPr lang="en-US" sz="700" dirty="0"/>
+          </a:p>
+        </p:txBody>
+      </p:sp>
+      <p:sp>
+        <p:nvSpPr>
+          <p:cNvPr id="13" name="Text 11"/>
+          <p:cNvSpPr/>
+          <p:nvPr/>
+        </p:nvSpPr>
+        <p:spPr>
+          <a:xfrm>
+            <a:off x="786384" y="3310128"/>
+            <a:ext cx="2231136" cy="164592"/>
+          </a:xfrm>
+          <a:prstGeom prst="rect">
+            <a:avLst/>
+          </a:prstGeom>
+          <a:noFill/>
+          <a:ln/>
+        </p:spPr>
+        <p:txBody>
+          <a:bodyPr wrap="square" lIns="0" tIns="0" rIns="0" bIns="0" rtlCol="0" anchor="ctr"/>
+          <a:lstStyle/>
+          <a:p>
+            <a:pPr indent="0" marL="0">
+              <a:buNone/>
+            </a:pPr>
+            <a:r>
+              <a:rPr lang="en-US" sz="900" b="1" dirty="0">
+                <a:solidFill>
+                  <a:srgbClr val="241E33"/>
+                </a:solidFill>
+                <a:latin typeface="Cambria" pitchFamily="34" charset="0"/>
+                <a:ea typeface="Cambria" pitchFamily="34" charset="-122"/>
+                <a:cs typeface="Cambria" pitchFamily="34" charset="-120"/>
+              </a:rPr>
+              <a:t>Scripps National Spelling Bee</a:t>
+            </a:r>
+            <a:endParaRPr lang="en-US" sz="900" dirty="0"/>
+          </a:p>
+        </p:txBody>
+      </p:sp>
+      <p:sp>
+        <p:nvSpPr>
+          <p:cNvPr id="14" name="Text 12"/>
+          <p:cNvSpPr/>
+          <p:nvPr/>
+        </p:nvSpPr>
+        <p:spPr>
+          <a:xfrm>
+            <a:off x="786384" y="3456432"/>
+            <a:ext cx="2231136" cy="237744"/>
+          </a:xfrm>
+          <a:prstGeom prst="rect">
+            <a:avLst/>
+          </a:prstGeom>
+          <a:noFill/>
+          <a:ln/>
+        </p:spPr>
+        <p:txBody>
+          <a:bodyPr wrap="square" lIns="0" tIns="0" rIns="0" bIns="0" rtlCol="0" anchor="ctr"/>
+          <a:lstStyle/>
+          <a:p>
+            <a:pPr indent="0" marL="0">
+              <a:lnSpc>
+                <a:spcPts val="850"/>
+              </a:lnSpc>
+              <a:buNone/>
+            </a:pPr>
+            <a:r>
+              <a:rPr lang="en-US" sz="700" dirty="0">
+                <a:solidFill>
+                  <a:srgbClr val="4A4360"/>
+                </a:solidFill>
+                <a:latin typeface="Calibri" pitchFamily="34" charset="0"/>
+                <a:ea typeface="Calibri" pitchFamily="34" charset="-122"/>
+                <a:cs typeface="Calibri" pitchFamily="34" charset="-120"/>
+              </a:rPr>
+              <a:t>The apex — but ships Word Club, so partner and rival at once</a:t>
+            </a:r>
+            <a:endParaRPr lang="en-US" sz="700" dirty="0"/>
+          </a:p>
+        </p:txBody>
+      </p:sp>
+      <p:sp>
+        <p:nvSpPr>
+          <p:cNvPr id="15" name="Text 13"/>
+          <p:cNvSpPr/>
+          <p:nvPr/>
+        </p:nvSpPr>
+        <p:spPr>
+          <a:xfrm>
+            <a:off x="786384" y="3712464"/>
+            <a:ext cx="2231136" cy="164592"/>
+          </a:xfrm>
+          <a:prstGeom prst="rect">
+            <a:avLst/>
+          </a:prstGeom>
+          <a:noFill/>
+          <a:ln/>
+        </p:spPr>
+        <p:txBody>
+          <a:bodyPr wrap="square" lIns="0" tIns="0" rIns="0" bIns="0" rtlCol="0" anchor="ctr"/>
+          <a:lstStyle/>
+          <a:p>
+            <a:pPr indent="0" marL="0">
+              <a:buNone/>
+            </a:pPr>
+            <a:r>
+              <a:rPr lang="en-US" sz="900" b="1" dirty="0">
+                <a:solidFill>
+                  <a:srgbClr val="241E33"/>
+                </a:solidFill>
+                <a:latin typeface="Cambria" pitchFamily="34" charset="0"/>
+                <a:ea typeface="Cambria" pitchFamily="34" charset="-122"/>
+                <a:cs typeface="Cambria" pitchFamily="34" charset="-120"/>
+              </a:rPr>
+              <a:t>SPELLPundit · Hexco</a:t>
+            </a:r>
+            <a:endParaRPr lang="en-US" sz="900" dirty="0"/>
+          </a:p>
+        </p:txBody>
+      </p:sp>
+      <p:sp>
+        <p:nvSpPr>
+          <p:cNvPr id="16" name="Text 14"/>
+          <p:cNvSpPr/>
+          <p:nvPr/>
+        </p:nvSpPr>
+        <p:spPr>
+          <a:xfrm>
+            <a:off x="786384" y="3858768"/>
+            <a:ext cx="2231136" cy="237744"/>
+          </a:xfrm>
+          <a:prstGeom prst="rect">
+            <a:avLst/>
+          </a:prstGeom>
+          <a:noFill/>
+          <a:ln/>
+        </p:spPr>
+        <p:txBody>
+          <a:bodyPr wrap="square" lIns="0" tIns="0" rIns="0" bIns="0" rtlCol="0" anchor="ctr"/>
+          <a:lstStyle/>
+          <a:p>
+            <a:pPr indent="0" marL="0">
+              <a:lnSpc>
+                <a:spcPts val="850"/>
+              </a:lnSpc>
+              <a:buNone/>
+            </a:pPr>
+            <a:r>
+              <a:rPr lang="en-US" sz="700" dirty="0">
+                <a:solidFill>
+                  <a:srgbClr val="4A4360"/>
+                </a:solidFill>
+                <a:latin typeface="Calibri" pitchFamily="34" charset="0"/>
+                <a:ea typeface="Calibri" pitchFamily="34" charset="-122"/>
+                <a:cs typeface="Calibri" pitchFamily="34" charset="-120"/>
+              </a:rPr>
+              <a:t>Direct competitors. Partner, or the eventual acquirer</a:t>
+            </a:r>
+            <a:endParaRPr lang="en-US" sz="700" dirty="0"/>
+          </a:p>
+        </p:txBody>
+      </p:sp>
+      <p:sp>
+        <p:nvSpPr>
+          <p:cNvPr id="17" name="Shape 15"/>
+          <p:cNvSpPr/>
+          <p:nvPr/>
+        </p:nvSpPr>
+        <p:spPr>
+          <a:xfrm>
+            <a:off x="3337560" y="1956816"/>
+            <a:ext cx="2523744" cy="2212848"/>
+          </a:xfrm>
+          <a:prstGeom prst="roundRect">
+            <a:avLst>
+              <a:gd name="adj" fmla="val 4959"/>
+            </a:avLst>
+          </a:prstGeom>
+          <a:solidFill>
+            <a:srgbClr val="EFEBF8"/>
+          </a:solidFill>
+          <a:ln/>
+        </p:spPr>
+      </p:sp>
+      <p:sp>
+        <p:nvSpPr>
+          <p:cNvPr id="18" name="Shape 16"/>
+          <p:cNvSpPr/>
+          <p:nvPr/>
+        </p:nvSpPr>
+        <p:spPr>
+          <a:xfrm>
+            <a:off x="3337560" y="1956816"/>
+            <a:ext cx="2523744" cy="256032"/>
+          </a:xfrm>
+          <a:prstGeom prst="roundRect">
+            <a:avLst>
+              <a:gd name="adj" fmla="val 42857"/>
+            </a:avLst>
+          </a:prstGeom>
+          <a:solidFill>
+            <a:srgbClr val="6C4FE0"/>
+          </a:solidFill>
+          <a:ln/>
+        </p:spPr>
+      </p:sp>
+      <p:sp>
+        <p:nvSpPr>
+          <p:cNvPr id="19" name="Text 17"/>
+          <p:cNvSpPr/>
+          <p:nvPr/>
+        </p:nvSpPr>
+        <p:spPr>
+          <a:xfrm>
+            <a:off x="3337560" y="1956816"/>
+            <a:ext cx="2523744" cy="256032"/>
+          </a:xfrm>
+          <a:prstGeom prst="rect">
+            <a:avLst/>
+          </a:prstGeom>
+          <a:noFill/>
+          <a:ln/>
+        </p:spPr>
+        <p:txBody>
+          <a:bodyPr wrap="square" lIns="0" tIns="0" rIns="0" bIns="0" rtlCol="0" anchor="ctr"/>
+          <a:lstStyle/>
+          <a:p>
+            <a:pPr algn="ctr" indent="0" marL="0">
+              <a:buNone/>
+            </a:pPr>
+            <a:r>
+              <a:rPr lang="en-US" sz="800" b="1" spc="120" kern="0" dirty="0">
+                <a:solidFill>
+                  <a:srgbClr val="FFFFFF"/>
+                </a:solidFill>
+                <a:latin typeface="Calibri" pitchFamily="34" charset="0"/>
+                <a:ea typeface="Calibri" pitchFamily="34" charset="-122"/>
+                <a:cs typeface="Calibri" pitchFamily="34" charset="-120"/>
+              </a:rPr>
+              <a:t>TUTOR &amp; TEACHER</a:t>
+            </a:r>
+            <a:endParaRPr lang="en-US" sz="800" dirty="0"/>
+          </a:p>
+        </p:txBody>
+      </p:sp>
+      <p:sp>
+        <p:nvSpPr>
+          <p:cNvPr id="20" name="Text 18"/>
+          <p:cNvSpPr/>
+          <p:nvPr/>
+        </p:nvSpPr>
+        <p:spPr>
+          <a:xfrm>
+            <a:off x="3483864" y="2249424"/>
+            <a:ext cx="2231136" cy="219456"/>
+          </a:xfrm>
+          <a:prstGeom prst="rect">
+            <a:avLst/>
+          </a:prstGeom>
+          <a:noFill/>
+          <a:ln/>
+        </p:spPr>
+        <p:txBody>
+          <a:bodyPr wrap="square" lIns="0" tIns="0" rIns="0" bIns="0" rtlCol="0" anchor="ctr"/>
+          <a:lstStyle/>
+          <a:p>
+            <a:pPr indent="0" marL="0">
+              <a:buNone/>
+            </a:pPr>
+            <a:r>
+              <a:rPr lang="en-US" sz="750" i="1" dirty="0">
+                <a:solidFill>
+                  <a:srgbClr val="7A7291"/>
+                </a:solidFill>
+                <a:latin typeface="Calibri" pitchFamily="34" charset="0"/>
+                <a:ea typeface="Calibri" pitchFamily="34" charset="-122"/>
+                <a:cs typeface="Calibri" pitchFamily="34" charset="-120"/>
+              </a:rPr>
+              <a:t>Distribution that already charges by the hour</a:t>
+            </a:r>
+            <a:endParaRPr lang="en-US" sz="750" dirty="0"/>
+          </a:p>
+        </p:txBody>
+      </p:sp>
+      <p:sp>
+        <p:nvSpPr>
+          <p:cNvPr id="21" name="Text 19"/>
+          <p:cNvSpPr/>
+          <p:nvPr/>
+        </p:nvSpPr>
+        <p:spPr>
+          <a:xfrm>
+            <a:off x="3483864" y="2505456"/>
+            <a:ext cx="2231136" cy="164592"/>
+          </a:xfrm>
+          <a:prstGeom prst="rect">
+            <a:avLst/>
+          </a:prstGeom>
+          <a:noFill/>
+          <a:ln/>
+        </p:spPr>
+        <p:txBody>
+          <a:bodyPr wrap="square" lIns="0" tIns="0" rIns="0" bIns="0" rtlCol="0" anchor="ctr"/>
+          <a:lstStyle/>
+          <a:p>
+            <a:pPr indent="0" marL="0">
+              <a:buNone/>
+            </a:pPr>
+            <a:r>
+              <a:rPr lang="en-US" sz="900" b="1" dirty="0">
+                <a:solidFill>
+                  <a:srgbClr val="241E33"/>
+                </a:solidFill>
+                <a:latin typeface="Cambria" pitchFamily="34" charset="0"/>
+                <a:ea typeface="Cambria" pitchFamily="34" charset="-122"/>
+                <a:cs typeface="Cambria" pitchFamily="34" charset="-120"/>
+              </a:rPr>
+              <a:t>Outschool</a:t>
+            </a:r>
+            <a:endParaRPr lang="en-US" sz="900" dirty="0"/>
+          </a:p>
+        </p:txBody>
+      </p:sp>
+      <p:sp>
+        <p:nvSpPr>
+          <p:cNvPr id="22" name="Text 20"/>
+          <p:cNvSpPr/>
+          <p:nvPr/>
+        </p:nvSpPr>
+        <p:spPr>
+          <a:xfrm>
+            <a:off x="3483864" y="2651760"/>
+            <a:ext cx="2231136" cy="237744"/>
+          </a:xfrm>
+          <a:prstGeom prst="rect">
+            <a:avLst/>
+          </a:prstGeom>
+          <a:noFill/>
+          <a:ln/>
+        </p:spPr>
+        <p:txBody>
+          <a:bodyPr wrap="square" lIns="0" tIns="0" rIns="0" bIns="0" rtlCol="0" anchor="ctr"/>
+          <a:lstStyle/>
+          <a:p>
+            <a:pPr indent="0" marL="0">
+              <a:lnSpc>
+                <a:spcPts val="850"/>
+              </a:lnSpc>
+              <a:buNone/>
+            </a:pPr>
+            <a:r>
+              <a:rPr lang="en-US" sz="700" dirty="0">
+                <a:solidFill>
+                  <a:srgbClr val="4A4360"/>
+                </a:solidFill>
+                <a:latin typeface="Calibri" pitchFamily="34" charset="0"/>
+                <a:ea typeface="Calibri" pitchFamily="34" charset="-122"/>
+                <a:cs typeface="Calibri" pitchFamily="34" charset="-120"/>
+              </a:rPr>
+              <a:t>Live small-group marketplace — the natural shelf for Business cohorts</a:t>
+            </a:r>
+            <a:endParaRPr lang="en-US" sz="700" dirty="0"/>
+          </a:p>
+        </p:txBody>
+      </p:sp>
+      <p:sp>
+        <p:nvSpPr>
+          <p:cNvPr id="23" name="Text 21"/>
+          <p:cNvSpPr/>
+          <p:nvPr/>
+        </p:nvSpPr>
+        <p:spPr>
+          <a:xfrm>
+            <a:off x="3483864" y="2907792"/>
+            <a:ext cx="2231136" cy="164592"/>
+          </a:xfrm>
+          <a:prstGeom prst="rect">
+            <a:avLst/>
+          </a:prstGeom>
+          <a:noFill/>
+          <a:ln/>
+        </p:spPr>
+        <p:txBody>
+          <a:bodyPr wrap="square" lIns="0" tIns="0" rIns="0" bIns="0" rtlCol="0" anchor="ctr"/>
+          <a:lstStyle/>
+          <a:p>
+            <a:pPr indent="0" marL="0">
+              <a:buNone/>
+            </a:pPr>
+            <a:r>
+              <a:rPr lang="en-US" sz="900" b="1" dirty="0">
+                <a:solidFill>
+                  <a:srgbClr val="241E33"/>
+                </a:solidFill>
+                <a:latin typeface="Cambria" pitchFamily="34" charset="0"/>
+                <a:ea typeface="Cambria" pitchFamily="34" charset="-122"/>
+                <a:cs typeface="Cambria" pitchFamily="34" charset="-120"/>
+              </a:rPr>
+              <a:t>Varsity Tutors · Wyzant</a:t>
+            </a:r>
+            <a:endParaRPr lang="en-US" sz="900" dirty="0"/>
+          </a:p>
+        </p:txBody>
+      </p:sp>
+      <p:sp>
+        <p:nvSpPr>
+          <p:cNvPr id="24" name="Text 22"/>
+          <p:cNvSpPr/>
+          <p:nvPr/>
+        </p:nvSpPr>
+        <p:spPr>
+          <a:xfrm>
+            <a:off x="3483864" y="3054096"/>
+            <a:ext cx="2231136" cy="237744"/>
+          </a:xfrm>
+          <a:prstGeom prst="rect">
+            <a:avLst/>
+          </a:prstGeom>
+          <a:noFill/>
+          <a:ln/>
+        </p:spPr>
+        <p:txBody>
+          <a:bodyPr wrap="square" lIns="0" tIns="0" rIns="0" bIns="0" rtlCol="0" anchor="ctr"/>
+          <a:lstStyle/>
+          <a:p>
+            <a:pPr indent="0" marL="0">
+              <a:lnSpc>
+                <a:spcPts val="850"/>
+              </a:lnSpc>
+              <a:buNone/>
+            </a:pPr>
+            <a:r>
+              <a:rPr lang="en-US" sz="700" dirty="0">
+                <a:solidFill>
+                  <a:srgbClr val="4A4360"/>
+                </a:solidFill>
+                <a:latin typeface="Calibri" pitchFamily="34" charset="0"/>
+                <a:ea typeface="Calibri" pitchFamily="34" charset="-122"/>
+                <a:cs typeface="Calibri" pitchFamily="34" charset="-120"/>
+              </a:rPr>
+              <a:t>Large US networks, both with a schools arm</a:t>
+            </a:r>
+            <a:endParaRPr lang="en-US" sz="700" dirty="0"/>
+          </a:p>
+        </p:txBody>
+      </p:sp>
+      <p:sp>
+        <p:nvSpPr>
+          <p:cNvPr id="25" name="Text 23"/>
+          <p:cNvSpPr/>
+          <p:nvPr/>
+        </p:nvSpPr>
+        <p:spPr>
+          <a:xfrm>
+            <a:off x="3483864" y="3310128"/>
+            <a:ext cx="2231136" cy="164592"/>
+          </a:xfrm>
+          <a:prstGeom prst="rect">
+            <a:avLst/>
+          </a:prstGeom>
+          <a:noFill/>
+          <a:ln/>
+        </p:spPr>
+        <p:txBody>
+          <a:bodyPr wrap="square" lIns="0" tIns="0" rIns="0" bIns="0" rtlCol="0" anchor="ctr"/>
+          <a:lstStyle/>
+          <a:p>
+            <a:pPr indent="0" marL="0">
+              <a:buNone/>
+            </a:pPr>
+            <a:r>
+              <a:rPr lang="en-US" sz="900" b="1" dirty="0">
+                <a:solidFill>
+                  <a:srgbClr val="241E33"/>
+                </a:solidFill>
+                <a:latin typeface="Cambria" pitchFamily="34" charset="0"/>
+                <a:ea typeface="Cambria" pitchFamily="34" charset="-122"/>
+                <a:cs typeface="Cambria" pitchFamily="34" charset="-120"/>
+              </a:rPr>
+              <a:t>Kumon · Mathnasium · Sylvan</a:t>
+            </a:r>
+            <a:endParaRPr lang="en-US" sz="900" dirty="0"/>
+          </a:p>
+        </p:txBody>
+      </p:sp>
+      <p:sp>
+        <p:nvSpPr>
+          <p:cNvPr id="26" name="Text 24"/>
+          <p:cNvSpPr/>
+          <p:nvPr/>
+        </p:nvSpPr>
+        <p:spPr>
+          <a:xfrm>
+            <a:off x="3483864" y="3456432"/>
+            <a:ext cx="2231136" cy="237744"/>
+          </a:xfrm>
+          <a:prstGeom prst="rect">
+            <a:avLst/>
+          </a:prstGeom>
+          <a:noFill/>
+          <a:ln/>
+        </p:spPr>
+        <p:txBody>
+          <a:bodyPr wrap="square" lIns="0" tIns="0" rIns="0" bIns="0" rtlCol="0" anchor="ctr"/>
+          <a:lstStyle/>
+          <a:p>
+            <a:pPr indent="0" marL="0">
+              <a:lnSpc>
+                <a:spcPts val="850"/>
+              </a:lnSpc>
+              <a:buNone/>
+            </a:pPr>
+            <a:r>
+              <a:rPr lang="en-US" sz="700" dirty="0">
+                <a:solidFill>
+                  <a:srgbClr val="4A4360"/>
+                </a:solidFill>
+                <a:latin typeface="Calibri" pitchFamily="34" charset="0"/>
+                <a:ea typeface="Calibri" pitchFamily="34" charset="-122"/>
+                <a:cs typeface="Calibri" pitchFamily="34" charset="-120"/>
+              </a:rPr>
+              <a:t>Franchise centres, heavy diaspora footfall. Sell as an add-on</a:t>
+            </a:r>
+            <a:endParaRPr lang="en-US" sz="700" dirty="0"/>
+          </a:p>
+        </p:txBody>
+      </p:sp>
+      <p:sp>
+        <p:nvSpPr>
+          <p:cNvPr id="27" name="Text 25"/>
+          <p:cNvSpPr/>
+          <p:nvPr/>
+        </p:nvSpPr>
+        <p:spPr>
+          <a:xfrm>
+            <a:off x="3483864" y="3712464"/>
+            <a:ext cx="2231136" cy="164592"/>
+          </a:xfrm>
+          <a:prstGeom prst="rect">
+            <a:avLst/>
+          </a:prstGeom>
+          <a:noFill/>
+          <a:ln/>
+        </p:spPr>
+        <p:txBody>
+          <a:bodyPr wrap="square" lIns="0" tIns="0" rIns="0" bIns="0" rtlCol="0" anchor="ctr"/>
+          <a:lstStyle/>
+          <a:p>
+            <a:pPr indent="0" marL="0">
+              <a:buNone/>
+            </a:pPr>
+            <a:r>
+              <a:rPr lang="en-US" sz="900" b="1" dirty="0">
+                <a:solidFill>
+                  <a:srgbClr val="241E33"/>
+                </a:solidFill>
+                <a:latin typeface="Cambria" pitchFamily="34" charset="0"/>
+                <a:ea typeface="Cambria" pitchFamily="34" charset="-122"/>
+                <a:cs typeface="Cambria" pitchFamily="34" charset="-120"/>
+              </a:rPr>
+              <a:t>UK: Explore Learning</a:t>
+            </a:r>
+            <a:endParaRPr lang="en-US" sz="900" dirty="0"/>
+          </a:p>
+        </p:txBody>
+      </p:sp>
+      <p:sp>
+        <p:nvSpPr>
+          <p:cNvPr id="28" name="Text 26"/>
+          <p:cNvSpPr/>
+          <p:nvPr/>
+        </p:nvSpPr>
+        <p:spPr>
+          <a:xfrm>
+            <a:off x="3483864" y="3858768"/>
+            <a:ext cx="2231136" cy="237744"/>
+          </a:xfrm>
+          <a:prstGeom prst="rect">
+            <a:avLst/>
+          </a:prstGeom>
+          <a:noFill/>
+          <a:ln/>
+        </p:spPr>
+        <p:txBody>
+          <a:bodyPr wrap="square" lIns="0" tIns="0" rIns="0" bIns="0" rtlCol="0" anchor="ctr"/>
+          <a:lstStyle/>
+          <a:p>
+            <a:pPr indent="0" marL="0">
+              <a:lnSpc>
+                <a:spcPts val="850"/>
+              </a:lnSpc>
+              <a:buNone/>
+            </a:pPr>
+            <a:r>
+              <a:rPr lang="en-US" sz="700" dirty="0">
+                <a:solidFill>
+                  <a:srgbClr val="4A4360"/>
+                </a:solidFill>
+                <a:latin typeface="Calibri" pitchFamily="34" charset="0"/>
+                <a:ea typeface="Calibri" pitchFamily="34" charset="-122"/>
+                <a:cs typeface="Calibri" pitchFamily="34" charset="-120"/>
+              </a:rPr>
+              <a:t>Third Space Learning sells tutoring INTO schools — a rail, not a rival</a:t>
+            </a:r>
+            <a:endParaRPr lang="en-US" sz="700" dirty="0"/>
+          </a:p>
+        </p:txBody>
+      </p:sp>
+      <p:sp>
+        <p:nvSpPr>
+          <p:cNvPr id="29" name="Shape 27"/>
+          <p:cNvSpPr/>
+          <p:nvPr/>
+        </p:nvSpPr>
+        <p:spPr>
+          <a:xfrm>
+            <a:off x="6035040" y="1956816"/>
+            <a:ext cx="2523744" cy="2212848"/>
+          </a:xfrm>
+          <a:prstGeom prst="roundRect">
+            <a:avLst>
+              <a:gd name="adj" fmla="val 4959"/>
+            </a:avLst>
+          </a:prstGeom>
+          <a:solidFill>
+            <a:srgbClr val="EFEBF8"/>
+          </a:solidFill>
+          <a:ln/>
+        </p:spPr>
+      </p:sp>
+      <p:sp>
+        <p:nvSpPr>
+          <p:cNvPr id="30" name="Shape 28"/>
+          <p:cNvSpPr/>
+          <p:nvPr/>
+        </p:nvSpPr>
+        <p:spPr>
+          <a:xfrm>
+            <a:off x="6035040" y="1956816"/>
+            <a:ext cx="2523744" cy="256032"/>
+          </a:xfrm>
+          <a:prstGeom prst="roundRect">
+            <a:avLst>
+              <a:gd name="adj" fmla="val 42857"/>
+            </a:avLst>
+          </a:prstGeom>
+          <a:solidFill>
+            <a:srgbClr val="F0B429"/>
+          </a:solidFill>
+          <a:ln/>
+        </p:spPr>
+      </p:sp>
+      <p:sp>
+        <p:nvSpPr>
+          <p:cNvPr id="31" name="Text 29"/>
+          <p:cNvSpPr/>
+          <p:nvPr/>
+        </p:nvSpPr>
+        <p:spPr>
+          <a:xfrm>
+            <a:off x="6035040" y="1956816"/>
+            <a:ext cx="2523744" cy="256032"/>
+          </a:xfrm>
+          <a:prstGeom prst="rect">
+            <a:avLst/>
+          </a:prstGeom>
+          <a:noFill/>
+          <a:ln/>
+        </p:spPr>
+        <p:txBody>
+          <a:bodyPr wrap="square" lIns="0" tIns="0" rIns="0" bIns="0" rtlCol="0" anchor="ctr"/>
+          <a:lstStyle/>
+          <a:p>
+            <a:pPr algn="ctr" indent="0" marL="0">
+              <a:buNone/>
+            </a:pPr>
+            <a:r>
+              <a:rPr lang="en-US" sz="800" b="1" spc="120" kern="0" dirty="0">
+                <a:solidFill>
+                  <a:srgbClr val="241E33"/>
+                </a:solidFill>
+                <a:latin typeface="Calibri" pitchFamily="34" charset="0"/>
+                <a:ea typeface="Calibri" pitchFamily="34" charset="-122"/>
+                <a:cs typeface="Calibri" pitchFamily="34" charset="-120"/>
+              </a:rPr>
+              <a:t>WEEKEND &amp; HERITAGE</a:t>
+            </a:r>
+            <a:endParaRPr lang="en-US" sz="800" dirty="0"/>
+          </a:p>
+        </p:txBody>
+      </p:sp>
+      <p:sp>
+        <p:nvSpPr>
+          <p:cNvPr id="32" name="Text 30"/>
+          <p:cNvSpPr/>
+          <p:nvPr/>
+        </p:nvSpPr>
+        <p:spPr>
+          <a:xfrm>
+            <a:off x="6181344" y="2249424"/>
+            <a:ext cx="2231136" cy="219456"/>
+          </a:xfrm>
+          <a:prstGeom prst="rect">
+            <a:avLst/>
+          </a:prstGeom>
+          <a:noFill/>
+          <a:ln/>
+        </p:spPr>
+        <p:txBody>
+          <a:bodyPr wrap="square" lIns="0" tIns="0" rIns="0" bIns="0" rtlCol="0" anchor="ctr"/>
+          <a:lstStyle/>
+          <a:p>
+            <a:pPr indent="0" marL="0">
+              <a:buNone/>
+            </a:pPr>
+            <a:r>
+              <a:rPr lang="en-US" sz="750" i="1" dirty="0">
+                <a:solidFill>
+                  <a:srgbClr val="7A7291"/>
+                </a:solidFill>
+                <a:latin typeface="Calibri" pitchFamily="34" charset="0"/>
+                <a:ea typeface="Calibri" pitchFamily="34" charset="-122"/>
+                <a:cs typeface="Calibri" pitchFamily="34" charset="-120"/>
+              </a:rPr>
+              <a:t>Where Bhasha belongs, and nobody is serving it</a:t>
+            </a:r>
+            <a:endParaRPr lang="en-US" sz="750" dirty="0"/>
+          </a:p>
+        </p:txBody>
+      </p:sp>
+      <p:sp>
+        <p:nvSpPr>
+          <p:cNvPr id="33" name="Text 31"/>
+          <p:cNvSpPr/>
+          <p:nvPr/>
+        </p:nvSpPr>
+        <p:spPr>
+          <a:xfrm>
+            <a:off x="6181344" y="2505456"/>
+            <a:ext cx="2231136" cy="164592"/>
+          </a:xfrm>
+          <a:prstGeom prst="rect">
+            <a:avLst/>
+          </a:prstGeom>
+          <a:noFill/>
+          <a:ln/>
+        </p:spPr>
+        <p:txBody>
+          <a:bodyPr wrap="square" lIns="0" tIns="0" rIns="0" bIns="0" rtlCol="0" anchor="ctr"/>
+          <a:lstStyle/>
+          <a:p>
+            <a:pPr indent="0" marL="0">
+              <a:buNone/>
+            </a:pPr>
+            <a:r>
+              <a:rPr lang="en-US" sz="900" b="1" dirty="0">
+                <a:solidFill>
+                  <a:srgbClr val="241E33"/>
+                </a:solidFill>
+                <a:latin typeface="Cambria" pitchFamily="34" charset="0"/>
+                <a:ea typeface="Cambria" pitchFamily="34" charset="-122"/>
+                <a:cs typeface="Cambria" pitchFamily="34" charset="-120"/>
+              </a:rPr>
+              <a:t>Chinmaya Mission · BAPS</a:t>
+            </a:r>
+            <a:endParaRPr lang="en-US" sz="900" dirty="0"/>
+          </a:p>
+        </p:txBody>
+      </p:sp>
+      <p:sp>
+        <p:nvSpPr>
+          <p:cNvPr id="34" name="Text 32"/>
+          <p:cNvSpPr/>
+          <p:nvPr/>
+        </p:nvSpPr>
+        <p:spPr>
+          <a:xfrm>
+            <a:off x="6181344" y="2651760"/>
+            <a:ext cx="2231136" cy="237744"/>
+          </a:xfrm>
+          <a:prstGeom prst="rect">
+            <a:avLst/>
+          </a:prstGeom>
+          <a:noFill/>
+          <a:ln/>
+        </p:spPr>
+        <p:txBody>
+          <a:bodyPr wrap="square" lIns="0" tIns="0" rIns="0" bIns="0" rtlCol="0" anchor="ctr"/>
+          <a:lstStyle/>
+          <a:p>
+            <a:pPr indent="0" marL="0">
+              <a:lnSpc>
+                <a:spcPts val="850"/>
+              </a:lnSpc>
+              <a:buNone/>
+            </a:pPr>
+            <a:r>
+              <a:rPr lang="en-US" sz="700" dirty="0">
+                <a:solidFill>
+                  <a:srgbClr val="4A4360"/>
+                </a:solidFill>
+                <a:latin typeface="Calibri" pitchFamily="34" charset="0"/>
+                <a:ea typeface="Calibri" pitchFamily="34" charset="-122"/>
+                <a:cs typeface="Calibri" pitchFamily="34" charset="-120"/>
+              </a:rPr>
+              <a:t>Bala Vihar and Bal Mandal run weekly classes at scale</a:t>
+            </a:r>
+            <a:endParaRPr lang="en-US" sz="700" dirty="0"/>
+          </a:p>
+        </p:txBody>
+      </p:sp>
+      <p:sp>
+        <p:nvSpPr>
+          <p:cNvPr id="35" name="Text 33"/>
+          <p:cNvSpPr/>
+          <p:nvPr/>
+        </p:nvSpPr>
+        <p:spPr>
+          <a:xfrm>
+            <a:off x="6181344" y="2907792"/>
+            <a:ext cx="2231136" cy="164592"/>
+          </a:xfrm>
+          <a:prstGeom prst="rect">
+            <a:avLst/>
+          </a:prstGeom>
+          <a:noFill/>
+          <a:ln/>
+        </p:spPr>
+        <p:txBody>
+          <a:bodyPr wrap="square" lIns="0" tIns="0" rIns="0" bIns="0" rtlCol="0" anchor="ctr"/>
+          <a:lstStyle/>
+          <a:p>
+            <a:pPr indent="0" marL="0">
+              <a:buNone/>
+            </a:pPr>
+            <a:r>
+              <a:rPr lang="en-US" sz="900" b="1" dirty="0">
+                <a:solidFill>
+                  <a:srgbClr val="241E33"/>
+                </a:solidFill>
+                <a:latin typeface="Cambria" pitchFamily="34" charset="0"/>
+                <a:ea typeface="Cambria" pitchFamily="34" charset="-122"/>
+                <a:cs typeface="Cambria" pitchFamily="34" charset="-120"/>
+              </a:rPr>
+              <a:t>Language academies</a:t>
+            </a:r>
+            <a:endParaRPr lang="en-US" sz="900" dirty="0"/>
+          </a:p>
+        </p:txBody>
+      </p:sp>
+      <p:sp>
+        <p:nvSpPr>
+          <p:cNvPr id="36" name="Text 34"/>
+          <p:cNvSpPr/>
+          <p:nvPr/>
+        </p:nvSpPr>
+        <p:spPr>
+          <a:xfrm>
+            <a:off x="6181344" y="3054096"/>
+            <a:ext cx="2231136" cy="237744"/>
+          </a:xfrm>
+          <a:prstGeom prst="rect">
+            <a:avLst/>
+          </a:prstGeom>
+          <a:noFill/>
+          <a:ln/>
+        </p:spPr>
+        <p:txBody>
+          <a:bodyPr wrap="square" lIns="0" tIns="0" rIns="0" bIns="0" rtlCol="0" anchor="ctr"/>
+          <a:lstStyle/>
+          <a:p>
+            <a:pPr indent="0" marL="0">
+              <a:lnSpc>
+                <a:spcPts val="850"/>
+              </a:lnSpc>
+              <a:buNone/>
+            </a:pPr>
+            <a:r>
+              <a:rPr lang="en-US" sz="700" dirty="0">
+                <a:solidFill>
+                  <a:srgbClr val="4A4360"/>
+                </a:solidFill>
+                <a:latin typeface="Calibri" pitchFamily="34" charset="0"/>
+                <a:ea typeface="Calibri" pitchFamily="34" charset="-122"/>
+                <a:cs typeface="Calibri" pitchFamily="34" charset="-120"/>
+              </a:rPr>
+              <a:t>Tamil, Telugu, Gujarati, Punjabi and Bengali schools across North America</a:t>
+            </a:r>
+            <a:endParaRPr lang="en-US" sz="700" dirty="0"/>
+          </a:p>
+        </p:txBody>
+      </p:sp>
+      <p:sp>
+        <p:nvSpPr>
+          <p:cNvPr id="37" name="Text 35"/>
+          <p:cNvSpPr/>
+          <p:nvPr/>
+        </p:nvSpPr>
+        <p:spPr>
+          <a:xfrm>
+            <a:off x="6181344" y="3310128"/>
+            <a:ext cx="2231136" cy="164592"/>
+          </a:xfrm>
+          <a:prstGeom prst="rect">
+            <a:avLst/>
+          </a:prstGeom>
+          <a:noFill/>
+          <a:ln/>
+        </p:spPr>
+        <p:txBody>
+          <a:bodyPr wrap="square" lIns="0" tIns="0" rIns="0" bIns="0" rtlCol="0" anchor="ctr"/>
+          <a:lstStyle/>
+          <a:p>
+            <a:pPr indent="0" marL="0">
+              <a:buNone/>
+            </a:pPr>
+            <a:r>
+              <a:rPr lang="en-US" sz="900" b="1" dirty="0">
+                <a:solidFill>
+                  <a:srgbClr val="241E33"/>
+                </a:solidFill>
+                <a:latin typeface="Cambria" pitchFamily="34" charset="0"/>
+                <a:ea typeface="Cambria" pitchFamily="34" charset="-122"/>
+                <a:cs typeface="Cambria" pitchFamily="34" charset="-120"/>
+              </a:rPr>
+              <a:t>TANA · ATA · community bodies</a:t>
+            </a:r>
+            <a:endParaRPr lang="en-US" sz="900" dirty="0"/>
+          </a:p>
+        </p:txBody>
+      </p:sp>
+      <p:sp>
+        <p:nvSpPr>
+          <p:cNvPr id="38" name="Text 36"/>
+          <p:cNvSpPr/>
+          <p:nvPr/>
+        </p:nvSpPr>
+        <p:spPr>
+          <a:xfrm>
+            <a:off x="6181344" y="3456432"/>
+            <a:ext cx="2231136" cy="237744"/>
+          </a:xfrm>
+          <a:prstGeom prst="rect">
+            <a:avLst/>
+          </a:prstGeom>
+          <a:noFill/>
+          <a:ln/>
+        </p:spPr>
+        <p:txBody>
+          <a:bodyPr wrap="square" lIns="0" tIns="0" rIns="0" bIns="0" rtlCol="0" anchor="ctr"/>
+          <a:lstStyle/>
+          <a:p>
+            <a:pPr indent="0" marL="0">
+              <a:lnSpc>
+                <a:spcPts val="850"/>
+              </a:lnSpc>
+              <a:buNone/>
+            </a:pPr>
+            <a:r>
+              <a:rPr lang="en-US" sz="700" dirty="0">
+                <a:solidFill>
+                  <a:srgbClr val="4A4360"/>
+                </a:solidFill>
+                <a:latin typeface="Calibri" pitchFamily="34" charset="0"/>
+                <a:ea typeface="Calibri" pitchFamily="34" charset="-122"/>
+                <a:cs typeface="Calibri" pitchFamily="34" charset="-120"/>
+              </a:rPr>
+              <a:t>Regional associations with conference stages and mailing lists</a:t>
+            </a:r>
+            <a:endParaRPr lang="en-US" sz="700" dirty="0"/>
+          </a:p>
+        </p:txBody>
+      </p:sp>
+      <p:sp>
+        <p:nvSpPr>
+          <p:cNvPr id="39" name="Text 37"/>
+          <p:cNvSpPr/>
+          <p:nvPr/>
+        </p:nvSpPr>
+        <p:spPr>
+          <a:xfrm>
+            <a:off x="6181344" y="3712464"/>
+            <a:ext cx="2231136" cy="164592"/>
+          </a:xfrm>
+          <a:prstGeom prst="rect">
+            <a:avLst/>
+          </a:prstGeom>
+          <a:noFill/>
+          <a:ln/>
+        </p:spPr>
+        <p:txBody>
+          <a:bodyPr wrap="square" lIns="0" tIns="0" rIns="0" bIns="0" rtlCol="0" anchor="ctr"/>
+          <a:lstStyle/>
+          <a:p>
+            <a:pPr indent="0" marL="0">
+              <a:buNone/>
+            </a:pPr>
+            <a:r>
+              <a:rPr lang="en-US" sz="900" b="1" dirty="0">
+                <a:solidFill>
+                  <a:srgbClr val="241E33"/>
+                </a:solidFill>
+                <a:latin typeface="Cambria" pitchFamily="34" charset="0"/>
+                <a:ea typeface="Cambria" pitchFamily="34" charset="-122"/>
+                <a:cs typeface="Cambria" pitchFamily="34" charset="-120"/>
+              </a:rPr>
+              <a:t>Temple &amp; gurdwara networks</a:t>
+            </a:r>
+            <a:endParaRPr lang="en-US" sz="900" dirty="0"/>
+          </a:p>
+        </p:txBody>
+      </p:sp>
+      <p:sp>
+        <p:nvSpPr>
+          <p:cNvPr id="40" name="Text 38"/>
+          <p:cNvSpPr/>
+          <p:nvPr/>
+        </p:nvSpPr>
+        <p:spPr>
+          <a:xfrm>
+            <a:off x="6181344" y="3858768"/>
+            <a:ext cx="2231136" cy="237744"/>
+          </a:xfrm>
+          <a:prstGeom prst="rect">
+            <a:avLst/>
+          </a:prstGeom>
+          <a:noFill/>
+          <a:ln/>
+        </p:spPr>
+        <p:txBody>
+          <a:bodyPr wrap="square" lIns="0" tIns="0" rIns="0" bIns="0" rtlCol="0" anchor="ctr"/>
+          <a:lstStyle/>
+          <a:p>
+            <a:pPr indent="0" marL="0">
+              <a:lnSpc>
+                <a:spcPts val="850"/>
+              </a:lnSpc>
+              <a:buNone/>
+            </a:pPr>
+            <a:r>
+              <a:rPr lang="en-US" sz="700" dirty="0">
+                <a:solidFill>
+                  <a:srgbClr val="4A4360"/>
+                </a:solidFill>
+                <a:latin typeface="Calibri" pitchFamily="34" charset="0"/>
+                <a:ea typeface="Calibri" pitchFamily="34" charset="-122"/>
+                <a:cs typeface="Calibri" pitchFamily="34" charset="-120"/>
+              </a:rPr>
+              <a:t>The most trusted room, and the hardest to enter on a sales call</a:t>
+            </a:r>
+            <a:endParaRPr lang="en-US" sz="700" dirty="0"/>
+          </a:p>
+        </p:txBody>
+      </p:sp>
+      <p:sp>
+        <p:nvSpPr>
+          <p:cNvPr id="41" name="Shape 39"/>
+          <p:cNvSpPr/>
+          <p:nvPr/>
+        </p:nvSpPr>
+        <p:spPr>
+          <a:xfrm>
+            <a:off x="8732520" y="1956816"/>
+            <a:ext cx="2523744" cy="2212848"/>
+          </a:xfrm>
+          <a:prstGeom prst="roundRect">
+            <a:avLst>
+              <a:gd name="adj" fmla="val 4959"/>
+            </a:avLst>
+          </a:prstGeom>
+          <a:solidFill>
+            <a:srgbClr val="EFEBF8"/>
+          </a:solidFill>
+          <a:ln/>
+        </p:spPr>
+      </p:sp>
+      <p:sp>
+        <p:nvSpPr>
+          <p:cNvPr id="42" name="Shape 40"/>
+          <p:cNvSpPr/>
+          <p:nvPr/>
+        </p:nvSpPr>
+        <p:spPr>
+          <a:xfrm>
+            <a:off x="8732520" y="1956816"/>
+            <a:ext cx="2523744" cy="256032"/>
+          </a:xfrm>
+          <a:prstGeom prst="roundRect">
+            <a:avLst>
+              <a:gd name="adj" fmla="val 42857"/>
+            </a:avLst>
+          </a:prstGeom>
+          <a:solidFill>
+            <a:srgbClr val="C4453C"/>
+          </a:solidFill>
+          <a:ln/>
+        </p:spPr>
+      </p:sp>
+      <p:sp>
+        <p:nvSpPr>
+          <p:cNvPr id="43" name="Text 41"/>
+          <p:cNvSpPr/>
+          <p:nvPr/>
+        </p:nvSpPr>
+        <p:spPr>
+          <a:xfrm>
+            <a:off x="8732520" y="1956816"/>
+            <a:ext cx="2523744" cy="256032"/>
+          </a:xfrm>
+          <a:prstGeom prst="rect">
+            <a:avLst/>
+          </a:prstGeom>
+          <a:noFill/>
+          <a:ln/>
+        </p:spPr>
+        <p:txBody>
+          <a:bodyPr wrap="square" lIns="0" tIns="0" rIns="0" bIns="0" rtlCol="0" anchor="ctr"/>
+          <a:lstStyle/>
+          <a:p>
+            <a:pPr algn="ctr" indent="0" marL="0">
+              <a:buNone/>
+            </a:pPr>
+            <a:r>
+              <a:rPr lang="en-US" sz="800" b="1" spc="120" kern="0" dirty="0">
+                <a:solidFill>
+                  <a:srgbClr val="FFFFFF"/>
+                </a:solidFill>
+                <a:latin typeface="Calibri" pitchFamily="34" charset="0"/>
+                <a:ea typeface="Calibri" pitchFamily="34" charset="-122"/>
+                <a:cs typeface="Calibri" pitchFamily="34" charset="-120"/>
+              </a:rPr>
+              <a:t>SCHOOL &amp; EMPLOYER RAILS</a:t>
+            </a:r>
+            <a:endParaRPr lang="en-US" sz="800" dirty="0"/>
+          </a:p>
+        </p:txBody>
+      </p:sp>
+      <p:sp>
+        <p:nvSpPr>
+          <p:cNvPr id="44" name="Text 42"/>
+          <p:cNvSpPr/>
+          <p:nvPr/>
+        </p:nvSpPr>
+        <p:spPr>
+          <a:xfrm>
+            <a:off x="8878824" y="2249424"/>
+            <a:ext cx="2231136" cy="219456"/>
+          </a:xfrm>
+          <a:prstGeom prst="rect">
+            <a:avLst/>
+          </a:prstGeom>
+          <a:noFill/>
+          <a:ln/>
+        </p:spPr>
+        <p:txBody>
+          <a:bodyPr wrap="square" lIns="0" tIns="0" rIns="0" bIns="0" rtlCol="0" anchor="ctr"/>
+          <a:lstStyle/>
+          <a:p>
+            <a:pPr indent="0" marL="0">
+              <a:buNone/>
+            </a:pPr>
+            <a:r>
+              <a:rPr lang="en-US" sz="750" i="1" dirty="0">
+                <a:solidFill>
+                  <a:srgbClr val="7A7291"/>
+                </a:solidFill>
+                <a:latin typeface="Calibri" pitchFamily="34" charset="0"/>
+                <a:ea typeface="Calibri" pitchFamily="34" charset="-122"/>
+                <a:cs typeface="Calibri" pitchFamily="34" charset="-120"/>
+              </a:rPr>
+              <a:t>Procurement, not persuasion</a:t>
+            </a:r>
+            <a:endParaRPr lang="en-US" sz="750" dirty="0"/>
+          </a:p>
+        </p:txBody>
+      </p:sp>
+      <p:sp>
+        <p:nvSpPr>
+          <p:cNvPr id="45" name="Text 43"/>
+          <p:cNvSpPr/>
+          <p:nvPr/>
+        </p:nvSpPr>
+        <p:spPr>
+          <a:xfrm>
+            <a:off x="8878824" y="2505456"/>
+            <a:ext cx="2231136" cy="164592"/>
+          </a:xfrm>
+          <a:prstGeom prst="rect">
+            <a:avLst/>
+          </a:prstGeom>
+          <a:noFill/>
+          <a:ln/>
+        </p:spPr>
+        <p:txBody>
+          <a:bodyPr wrap="square" lIns="0" tIns="0" rIns="0" bIns="0" rtlCol="0" anchor="ctr"/>
+          <a:lstStyle/>
+          <a:p>
+            <a:pPr indent="0" marL="0">
+              <a:buNone/>
+            </a:pPr>
+            <a:r>
+              <a:rPr lang="en-US" sz="900" b="1" dirty="0">
+                <a:solidFill>
+                  <a:srgbClr val="241E33"/>
+                </a:solidFill>
+                <a:latin typeface="Cambria" pitchFamily="34" charset="0"/>
+                <a:ea typeface="Cambria" pitchFamily="34" charset="-122"/>
+                <a:cs typeface="Cambria" pitchFamily="34" charset="-120"/>
+              </a:rPr>
+              <a:t>Clever · ClassLink</a:t>
+            </a:r>
+            <a:endParaRPr lang="en-US" sz="900" dirty="0"/>
+          </a:p>
+        </p:txBody>
+      </p:sp>
+      <p:sp>
+        <p:nvSpPr>
+          <p:cNvPr id="46" name="Text 44"/>
+          <p:cNvSpPr/>
+          <p:nvPr/>
+        </p:nvSpPr>
+        <p:spPr>
+          <a:xfrm>
+            <a:off x="8878824" y="2651760"/>
+            <a:ext cx="2231136" cy="237744"/>
+          </a:xfrm>
+          <a:prstGeom prst="rect">
+            <a:avLst/>
+          </a:prstGeom>
+          <a:noFill/>
+          <a:ln/>
+        </p:spPr>
+        <p:txBody>
+          <a:bodyPr wrap="square" lIns="0" tIns="0" rIns="0" bIns="0" rtlCol="0" anchor="ctr"/>
+          <a:lstStyle/>
+          <a:p>
+            <a:pPr indent="0" marL="0">
+              <a:lnSpc>
+                <a:spcPts val="850"/>
+              </a:lnSpc>
+              <a:buNone/>
+            </a:pPr>
+            <a:r>
+              <a:rPr lang="en-US" sz="700" dirty="0">
+                <a:solidFill>
+                  <a:srgbClr val="4A4360"/>
+                </a:solidFill>
+                <a:latin typeface="Calibri" pitchFamily="34" charset="0"/>
+                <a:ea typeface="Calibri" pitchFamily="34" charset="-122"/>
+                <a:cs typeface="Calibri" pitchFamily="34" charset="-120"/>
+              </a:rPr>
+              <a:t>Rostering. Without one of these a district cannot deploy us</a:t>
+            </a:r>
+            <a:endParaRPr lang="en-US" sz="700" dirty="0"/>
+          </a:p>
+        </p:txBody>
+      </p:sp>
+      <p:sp>
+        <p:nvSpPr>
+          <p:cNvPr id="47" name="Text 45"/>
+          <p:cNvSpPr/>
+          <p:nvPr/>
+        </p:nvSpPr>
+        <p:spPr>
+          <a:xfrm>
+            <a:off x="8878824" y="2907792"/>
+            <a:ext cx="2231136" cy="164592"/>
+          </a:xfrm>
+          <a:prstGeom prst="rect">
+            <a:avLst/>
+          </a:prstGeom>
+          <a:noFill/>
+          <a:ln/>
+        </p:spPr>
+        <p:txBody>
+          <a:bodyPr wrap="square" lIns="0" tIns="0" rIns="0" bIns="0" rtlCol="0" anchor="ctr"/>
+          <a:lstStyle/>
+          <a:p>
+            <a:pPr indent="0" marL="0">
+              <a:buNone/>
+            </a:pPr>
+            <a:r>
+              <a:rPr lang="en-US" sz="900" b="1" dirty="0">
+                <a:solidFill>
+                  <a:srgbClr val="241E33"/>
+                </a:solidFill>
+                <a:latin typeface="Cambria" pitchFamily="34" charset="0"/>
+                <a:ea typeface="Cambria" pitchFamily="34" charset="-122"/>
+                <a:cs typeface="Cambria" pitchFamily="34" charset="-120"/>
+              </a:rPr>
+              <a:t>SDPC · iKeepSafe</a:t>
+            </a:r>
+            <a:endParaRPr lang="en-US" sz="900" dirty="0"/>
+          </a:p>
+        </p:txBody>
+      </p:sp>
+      <p:sp>
+        <p:nvSpPr>
+          <p:cNvPr id="48" name="Text 46"/>
+          <p:cNvSpPr/>
+          <p:nvPr/>
+        </p:nvSpPr>
+        <p:spPr>
+          <a:xfrm>
+            <a:off x="8878824" y="3054096"/>
+            <a:ext cx="2231136" cy="237744"/>
+          </a:xfrm>
+          <a:prstGeom prst="rect">
+            <a:avLst/>
+          </a:prstGeom>
+          <a:noFill/>
+          <a:ln/>
+        </p:spPr>
+        <p:txBody>
+          <a:bodyPr wrap="square" lIns="0" tIns="0" rIns="0" bIns="0" rtlCol="0" anchor="ctr"/>
+          <a:lstStyle/>
+          <a:p>
+            <a:pPr indent="0" marL="0">
+              <a:lnSpc>
+                <a:spcPts val="850"/>
+              </a:lnSpc>
+              <a:buNone/>
+            </a:pPr>
+            <a:r>
+              <a:rPr lang="en-US" sz="700" dirty="0">
+                <a:solidFill>
+                  <a:srgbClr val="4A4360"/>
+                </a:solidFill>
+                <a:latin typeface="Calibri" pitchFamily="34" charset="0"/>
+                <a:ea typeface="Calibri" pitchFamily="34" charset="-122"/>
+                <a:cs typeface="Calibri" pitchFamily="34" charset="-120"/>
+              </a:rPr>
+              <a:t>The data agreement and COPPA/FERPA certification that gate every district</a:t>
+            </a:r>
+            <a:endParaRPr lang="en-US" sz="700" dirty="0"/>
+          </a:p>
+        </p:txBody>
+      </p:sp>
+      <p:sp>
+        <p:nvSpPr>
+          <p:cNvPr id="49" name="Text 47"/>
+          <p:cNvSpPr/>
+          <p:nvPr/>
+        </p:nvSpPr>
+        <p:spPr>
+          <a:xfrm>
+            <a:off x="8878824" y="3310128"/>
+            <a:ext cx="2231136" cy="164592"/>
+          </a:xfrm>
+          <a:prstGeom prst="rect">
+            <a:avLst/>
+          </a:prstGeom>
+          <a:noFill/>
+          <a:ln/>
+        </p:spPr>
+        <p:txBody>
+          <a:bodyPr wrap="square" lIns="0" tIns="0" rIns="0" bIns="0" rtlCol="0" anchor="ctr"/>
+          <a:lstStyle/>
+          <a:p>
+            <a:pPr indent="0" marL="0">
+              <a:buNone/>
+            </a:pPr>
+            <a:r>
+              <a:rPr lang="en-US" sz="900" b="1" dirty="0">
+                <a:solidFill>
+                  <a:srgbClr val="241E33"/>
+                </a:solidFill>
+                <a:latin typeface="Cambria" pitchFamily="34" charset="0"/>
+                <a:ea typeface="Cambria" pitchFamily="34" charset="-122"/>
+                <a:cs typeface="Cambria" pitchFamily="34" charset="-120"/>
+              </a:rPr>
+              <a:t>First districts to try</a:t>
+            </a:r>
+            <a:endParaRPr lang="en-US" sz="900" dirty="0"/>
+          </a:p>
+        </p:txBody>
+      </p:sp>
+      <p:sp>
+        <p:nvSpPr>
+          <p:cNvPr id="50" name="Text 48"/>
+          <p:cNvSpPr/>
+          <p:nvPr/>
+        </p:nvSpPr>
+        <p:spPr>
+          <a:xfrm>
+            <a:off x="8878824" y="3456432"/>
+            <a:ext cx="2231136" cy="237744"/>
+          </a:xfrm>
+          <a:prstGeom prst="rect">
+            <a:avLst/>
+          </a:prstGeom>
+          <a:noFill/>
+          <a:ln/>
+        </p:spPr>
+        <p:txBody>
+          <a:bodyPr wrap="square" lIns="0" tIns="0" rIns="0" bIns="0" rtlCol="0" anchor="ctr"/>
+          <a:lstStyle/>
+          <a:p>
+            <a:pPr indent="0" marL="0">
+              <a:lnSpc>
+                <a:spcPts val="850"/>
+              </a:lnSpc>
+              <a:buNone/>
+            </a:pPr>
+            <a:r>
+              <a:rPr lang="en-US" sz="700" dirty="0">
+                <a:solidFill>
+                  <a:srgbClr val="4A4360"/>
+                </a:solidFill>
+                <a:latin typeface="Calibri" pitchFamily="34" charset="0"/>
+                <a:ea typeface="Calibri" pitchFamily="34" charset="-122"/>
+                <a:cs typeface="Calibri" pitchFamily="34" charset="-120"/>
+              </a:rPr>
+              <a:t>Fremont, Cupertino, Plano, Frisco, Naperville, Edison, Bellevue</a:t>
+            </a:r>
+            <a:endParaRPr lang="en-US" sz="700" dirty="0"/>
+          </a:p>
+        </p:txBody>
+      </p:sp>
+      <p:sp>
+        <p:nvSpPr>
+          <p:cNvPr id="51" name="Text 49"/>
+          <p:cNvSpPr/>
+          <p:nvPr/>
+        </p:nvSpPr>
+        <p:spPr>
+          <a:xfrm>
+            <a:off x="8878824" y="3712464"/>
+            <a:ext cx="2231136" cy="164592"/>
+          </a:xfrm>
+          <a:prstGeom prst="rect">
+            <a:avLst/>
+          </a:prstGeom>
+          <a:noFill/>
+          <a:ln/>
+        </p:spPr>
+        <p:txBody>
+          <a:bodyPr wrap="square" lIns="0" tIns="0" rIns="0" bIns="0" rtlCol="0" anchor="ctr"/>
+          <a:lstStyle/>
+          <a:p>
+            <a:pPr indent="0" marL="0">
+              <a:buNone/>
+            </a:pPr>
+            <a:r>
+              <a:rPr lang="en-US" sz="900" b="1" dirty="0">
+                <a:solidFill>
+                  <a:srgbClr val="241E33"/>
+                </a:solidFill>
+                <a:latin typeface="Cambria" pitchFamily="34" charset="0"/>
+                <a:ea typeface="Cambria" pitchFamily="34" charset="-122"/>
+                <a:cs typeface="Cambria" pitchFamily="34" charset="-120"/>
+              </a:rPr>
+              <a:t>Employer benefits teams</a:t>
+            </a:r>
+            <a:endParaRPr lang="en-US" sz="900" dirty="0"/>
+          </a:p>
+        </p:txBody>
+      </p:sp>
+      <p:sp>
+        <p:nvSpPr>
+          <p:cNvPr id="52" name="Text 50"/>
+          <p:cNvSpPr/>
+          <p:nvPr/>
+        </p:nvSpPr>
+        <p:spPr>
+          <a:xfrm>
+            <a:off x="8878824" y="3858768"/>
+            <a:ext cx="2231136" cy="237744"/>
+          </a:xfrm>
+          <a:prstGeom prst="rect">
+            <a:avLst/>
+          </a:prstGeom>
+          <a:noFill/>
+          <a:ln/>
+        </p:spPr>
+        <p:txBody>
+          <a:bodyPr wrap="square" lIns="0" tIns="0" rIns="0" bIns="0" rtlCol="0" anchor="ctr"/>
+          <a:lstStyle/>
+          <a:p>
+            <a:pPr indent="0" marL="0">
+              <a:lnSpc>
+                <a:spcPts val="850"/>
+              </a:lnSpc>
+              <a:buNone/>
+            </a:pPr>
+            <a:r>
+              <a:rPr lang="en-US" sz="700" dirty="0">
+                <a:solidFill>
+                  <a:srgbClr val="4A4360"/>
+                </a:solidFill>
+                <a:latin typeface="Calibri" pitchFamily="34" charset="0"/>
+                <a:ea typeface="Calibri" pitchFamily="34" charset="-122"/>
+                <a:cs typeface="Calibri" pitchFamily="34" charset="-120"/>
+              </a:rPr>
+              <a:t>Microsoft, Google, Deloitte, Infosys, TCS — family learning stipends</a:t>
+            </a:r>
+            <a:endParaRPr lang="en-US" sz="700" dirty="0"/>
+          </a:p>
+        </p:txBody>
+      </p:sp>
+      <p:sp>
+        <p:nvSpPr>
+          <p:cNvPr id="53" name="Text 51"/>
+          <p:cNvSpPr/>
+          <p:nvPr/>
+        </p:nvSpPr>
+        <p:spPr>
+          <a:xfrm>
+            <a:off x="640080" y="4279392"/>
+            <a:ext cx="4572000" cy="274320"/>
+          </a:xfrm>
+          <a:prstGeom prst="rect">
+            <a:avLst/>
+          </a:prstGeom>
+          <a:noFill/>
+          <a:ln/>
+        </p:spPr>
+        <p:txBody>
+          <a:bodyPr wrap="square" lIns="0" tIns="0" rIns="0" bIns="0" rtlCol="0" anchor="ctr"/>
+          <a:lstStyle/>
+          <a:p>
+            <a:pPr indent="0" marL="0">
+              <a:buNone/>
+            </a:pPr>
+            <a:r>
+              <a:rPr lang="en-US" sz="1500" b="1" dirty="0">
+                <a:solidFill>
+                  <a:srgbClr val="241E33"/>
+                </a:solidFill>
+                <a:latin typeface="Cambria" pitchFamily="34" charset="0"/>
+                <a:ea typeface="Cambria" pitchFamily="34" charset="-122"/>
+                <a:cs typeface="Cambria" pitchFamily="34" charset="-120"/>
+              </a:rPr>
+              <a:t>Three flagship programmes to take to them</a:t>
+            </a:r>
+            <a:endParaRPr lang="en-US" sz="1500" dirty="0"/>
+          </a:p>
+        </p:txBody>
+      </p:sp>
+      <p:sp>
+        <p:nvSpPr>
+          <p:cNvPr id="54" name="Text 52"/>
+          <p:cNvSpPr/>
+          <p:nvPr/>
+        </p:nvSpPr>
+        <p:spPr>
+          <a:xfrm>
+            <a:off x="5394960" y="4315968"/>
+            <a:ext cx="5852160" cy="237744"/>
+          </a:xfrm>
+          <a:prstGeom prst="rect">
+            <a:avLst/>
+          </a:prstGeom>
+          <a:noFill/>
+          <a:ln/>
+        </p:spPr>
+        <p:txBody>
+          <a:bodyPr wrap="square" lIns="0" tIns="0" rIns="0" bIns="0" rtlCol="0" anchor="ctr"/>
+          <a:lstStyle/>
+          <a:p>
+            <a:pPr indent="0" marL="0">
+              <a:buNone/>
+            </a:pPr>
+            <a:r>
+              <a:rPr lang="en-US" sz="950" i="1" dirty="0">
+                <a:solidFill>
+                  <a:srgbClr val="7A7291"/>
+                </a:solidFill>
+                <a:latin typeface="Calibri" pitchFamily="34" charset="0"/>
+                <a:ea typeface="Calibri" pitchFamily="34" charset="-122"/>
+                <a:cs typeface="Calibri" pitchFamily="34" charset="-120"/>
+              </a:rPr>
+              <a:t>Each sells a whole thing a network can run, not a licence it has to explain.</a:t>
+            </a:r>
+            <a:endParaRPr lang="en-US" sz="950" dirty="0"/>
+          </a:p>
+        </p:txBody>
+      </p:sp>
+      <p:sp>
+        <p:nvSpPr>
+          <p:cNvPr id="55" name="Shape 53"/>
+          <p:cNvSpPr/>
+          <p:nvPr/>
+        </p:nvSpPr>
+        <p:spPr>
+          <a:xfrm>
+            <a:off x="640080" y="4608576"/>
+            <a:ext cx="3429000" cy="1170432"/>
+          </a:xfrm>
+          <a:prstGeom prst="roundRect">
+            <a:avLst>
+              <a:gd name="adj" fmla="val 9375"/>
+            </a:avLst>
+          </a:prstGeom>
+          <a:solidFill>
+            <a:srgbClr val="EFEBF8"/>
+          </a:solidFill>
+          <a:ln/>
+        </p:spPr>
+      </p:sp>
+      <p:sp>
+        <p:nvSpPr>
+          <p:cNvPr id="56" name="Shape 54"/>
+          <p:cNvSpPr/>
+          <p:nvPr/>
+        </p:nvSpPr>
+        <p:spPr>
+          <a:xfrm>
+            <a:off x="640080" y="4608576"/>
+            <a:ext cx="64008" cy="1170432"/>
+          </a:xfrm>
+          <a:prstGeom prst="rect">
+            <a:avLst/>
+          </a:prstGeom>
+          <a:solidFill>
+            <a:srgbClr val="178A4C"/>
+          </a:solidFill>
+          <a:ln/>
+        </p:spPr>
+      </p:sp>
+      <p:sp>
+        <p:nvSpPr>
+          <p:cNvPr id="57" name="Text 55"/>
+          <p:cNvSpPr/>
+          <p:nvPr/>
+        </p:nvSpPr>
+        <p:spPr>
+          <a:xfrm>
+            <a:off x="859536" y="4690872"/>
+            <a:ext cx="3063240" cy="219456"/>
+          </a:xfrm>
+          <a:prstGeom prst="rect">
+            <a:avLst/>
+          </a:prstGeom>
+          <a:noFill/>
+          <a:ln/>
+        </p:spPr>
+        <p:txBody>
+          <a:bodyPr wrap="square" lIns="0" tIns="0" rIns="0" bIns="0" rtlCol="0" anchor="ctr"/>
+          <a:lstStyle/>
+          <a:p>
+            <a:pPr indent="0" marL="0">
+              <a:buNone/>
+            </a:pPr>
+            <a:r>
+              <a:rPr lang="en-US" sz="850" b="1" spc="120" kern="0" dirty="0">
+                <a:solidFill>
+                  <a:srgbClr val="178A4C"/>
+                </a:solidFill>
+                <a:latin typeface="Calibri" pitchFamily="34" charset="0"/>
+                <a:ea typeface="Calibri" pitchFamily="34" charset="-122"/>
+                <a:cs typeface="Calibri" pitchFamily="34" charset="-120"/>
+              </a:rPr>
+              <a:t>BEE SEASON IN A BOX</a:t>
+            </a:r>
+            <a:endParaRPr lang="en-US" sz="850" dirty="0"/>
+          </a:p>
+        </p:txBody>
+      </p:sp>
+      <p:sp>
+        <p:nvSpPr>
+          <p:cNvPr id="58" name="Text 56"/>
+          <p:cNvSpPr/>
+          <p:nvPr/>
+        </p:nvSpPr>
+        <p:spPr>
+          <a:xfrm>
+            <a:off x="859536" y="4892040"/>
+            <a:ext cx="3063240" cy="237744"/>
+          </a:xfrm>
+          <a:prstGeom prst="rect">
+            <a:avLst/>
+          </a:prstGeom>
+          <a:noFill/>
+          <a:ln/>
+        </p:spPr>
+        <p:txBody>
+          <a:bodyPr wrap="square" lIns="0" tIns="0" rIns="0" bIns="0" rtlCol="0" anchor="ctr"/>
+          <a:lstStyle/>
+          <a:p>
+            <a:pPr indent="0" marL="0">
+              <a:buNone/>
+            </a:pPr>
+            <a:r>
+              <a:rPr lang="en-US" sz="1100" b="1" dirty="0">
+                <a:solidFill>
+                  <a:srgbClr val="241E33"/>
+                </a:solidFill>
+                <a:latin typeface="Cambria" pitchFamily="34" charset="0"/>
+                <a:ea typeface="Cambria" pitchFamily="34" charset="-122"/>
+                <a:cs typeface="Cambria" pitchFamily="34" charset="-120"/>
+              </a:rPr>
+              <a:t>A chapter or district runs its own bee</a:t>
+            </a:r>
+            <a:endParaRPr lang="en-US" sz="1100" dirty="0"/>
+          </a:p>
+        </p:txBody>
+      </p:sp>
+      <p:sp>
+        <p:nvSpPr>
+          <p:cNvPr id="59" name="Text 57"/>
+          <p:cNvSpPr/>
+          <p:nvPr/>
+        </p:nvSpPr>
+        <p:spPr>
+          <a:xfrm>
+            <a:off x="859536" y="5138928"/>
+            <a:ext cx="3063240" cy="566928"/>
+          </a:xfrm>
+          <a:prstGeom prst="rect">
+            <a:avLst/>
+          </a:prstGeom>
+          <a:noFill/>
+          <a:ln/>
+        </p:spPr>
+        <p:txBody>
+          <a:bodyPr wrap="square" lIns="0" tIns="0" rIns="0" bIns="0" rtlCol="0" anchor="ctr"/>
+          <a:lstStyle/>
+          <a:p>
+            <a:pPr indent="0" marL="0">
+              <a:lnSpc>
+                <a:spcPts val="1000"/>
+              </a:lnSpc>
+              <a:buNone/>
+            </a:pPr>
+            <a:r>
+              <a:rPr lang="en-US" sz="800" dirty="0">
+                <a:solidFill>
+                  <a:srgbClr val="4A4360"/>
+                </a:solidFill>
+                <a:latin typeface="Calibri" pitchFamily="34" charset="0"/>
+                <a:ea typeface="Calibri" pitchFamily="34" charset="-122"/>
+                <a:cs typeface="Calibri" pitchFamily="34" charset="-120"/>
+              </a:rPr>
+              <a:t>Graded word lists, pronouncer audio, judge sheets, a live scoreboard. The 42,483 recorded clips mean we can already pronounce every word — the single hardest part of running a bee, solved before we ask.</a:t>
+            </a:r>
+            <a:endParaRPr lang="en-US" sz="800" dirty="0"/>
+          </a:p>
+        </p:txBody>
+      </p:sp>
+      <p:sp>
+        <p:nvSpPr>
+          <p:cNvPr id="60" name="Shape 58"/>
+          <p:cNvSpPr/>
+          <p:nvPr/>
+        </p:nvSpPr>
+        <p:spPr>
+          <a:xfrm>
+            <a:off x="4251960" y="4608576"/>
+            <a:ext cx="3429000" cy="1170432"/>
+          </a:xfrm>
+          <a:prstGeom prst="roundRect">
+            <a:avLst>
+              <a:gd name="adj" fmla="val 9375"/>
+            </a:avLst>
+          </a:prstGeom>
+          <a:solidFill>
+            <a:srgbClr val="EFEBF8"/>
+          </a:solidFill>
+          <a:ln/>
+        </p:spPr>
+      </p:sp>
+      <p:sp>
+        <p:nvSpPr>
+          <p:cNvPr id="61" name="Shape 59"/>
+          <p:cNvSpPr/>
+          <p:nvPr/>
+        </p:nvSpPr>
+        <p:spPr>
+          <a:xfrm>
+            <a:off x="4251960" y="4608576"/>
+            <a:ext cx="64008" cy="1170432"/>
+          </a:xfrm>
+          <a:prstGeom prst="rect">
+            <a:avLst/>
+          </a:prstGeom>
+          <a:solidFill>
+            <a:srgbClr val="F0B429"/>
+          </a:solidFill>
+          <a:ln/>
+        </p:spPr>
+      </p:sp>
+      <p:sp>
+        <p:nvSpPr>
+          <p:cNvPr id="62" name="Text 60"/>
+          <p:cNvSpPr/>
+          <p:nvPr/>
+        </p:nvSpPr>
+        <p:spPr>
+          <a:xfrm>
+            <a:off x="4471416" y="4690872"/>
+            <a:ext cx="3063240" cy="219456"/>
+          </a:xfrm>
+          <a:prstGeom prst="rect">
+            <a:avLst/>
+          </a:prstGeom>
+          <a:noFill/>
+          <a:ln/>
+        </p:spPr>
+        <p:txBody>
+          <a:bodyPr wrap="square" lIns="0" tIns="0" rIns="0" bIns="0" rtlCol="0" anchor="ctr"/>
+          <a:lstStyle/>
+          <a:p>
+            <a:pPr indent="0" marL="0">
+              <a:buNone/>
+            </a:pPr>
+            <a:r>
+              <a:rPr lang="en-US" sz="850" b="1" spc="120" kern="0" dirty="0">
+                <a:solidFill>
+                  <a:srgbClr val="F0B429"/>
+                </a:solidFill>
+                <a:latin typeface="Calibri" pitchFamily="34" charset="0"/>
+                <a:ea typeface="Calibri" pitchFamily="34" charset="-122"/>
+                <a:cs typeface="Calibri" pitchFamily="34" charset="-120"/>
+              </a:rPr>
+              <a:t>BHASHA SATURDAY</a:t>
+            </a:r>
+            <a:endParaRPr lang="en-US" sz="850" dirty="0"/>
+          </a:p>
+        </p:txBody>
+      </p:sp>
+      <p:sp>
+        <p:nvSpPr>
+          <p:cNvPr id="63" name="Text 61"/>
+          <p:cNvSpPr/>
+          <p:nvPr/>
+        </p:nvSpPr>
+        <p:spPr>
+          <a:xfrm>
+            <a:off x="4471416" y="4892040"/>
+            <a:ext cx="3063240" cy="237744"/>
+          </a:xfrm>
+          <a:prstGeom prst="rect">
+            <a:avLst/>
+          </a:prstGeom>
+          <a:noFill/>
+          <a:ln/>
+        </p:spPr>
+        <p:txBody>
+          <a:bodyPr wrap="square" lIns="0" tIns="0" rIns="0" bIns="0" rtlCol="0" anchor="ctr"/>
+          <a:lstStyle/>
+          <a:p>
+            <a:pPr indent="0" marL="0">
+              <a:buNone/>
+            </a:pPr>
+            <a:r>
+              <a:rPr lang="en-US" sz="1100" b="1" dirty="0">
+                <a:solidFill>
+                  <a:srgbClr val="241E33"/>
+                </a:solidFill>
+                <a:latin typeface="Cambria" pitchFamily="34" charset="0"/>
+                <a:ea typeface="Cambria" pitchFamily="34" charset="-122"/>
+                <a:cs typeface="Cambria" pitchFamily="34" charset="-120"/>
+              </a:rPr>
+              <a:t>A 30-week heritage-language track</a:t>
+            </a:r>
+            <a:endParaRPr lang="en-US" sz="1100" dirty="0"/>
+          </a:p>
+        </p:txBody>
+      </p:sp>
+      <p:sp>
+        <p:nvSpPr>
+          <p:cNvPr id="64" name="Text 62"/>
+          <p:cNvSpPr/>
+          <p:nvPr/>
+        </p:nvSpPr>
+        <p:spPr>
+          <a:xfrm>
+            <a:off x="4471416" y="5138928"/>
+            <a:ext cx="3063240" cy="566928"/>
+          </a:xfrm>
+          <a:prstGeom prst="rect">
+            <a:avLst/>
+          </a:prstGeom>
+          <a:noFill/>
+          <a:ln/>
+        </p:spPr>
+        <p:txBody>
+          <a:bodyPr wrap="square" lIns="0" tIns="0" rIns="0" bIns="0" rtlCol="0" anchor="ctr"/>
+          <a:lstStyle/>
+          <a:p>
+            <a:pPr indent="0" marL="0">
+              <a:lnSpc>
+                <a:spcPts val="1000"/>
+              </a:lnSpc>
+              <a:buNone/>
+            </a:pPr>
+            <a:r>
+              <a:rPr lang="en-US" sz="800" dirty="0">
+                <a:solidFill>
+                  <a:srgbClr val="4A4360"/>
+                </a:solidFill>
+                <a:latin typeface="Calibri" pitchFamily="34" charset="0"/>
+                <a:ea typeface="Calibri" pitchFamily="34" charset="-122"/>
+                <a:cs typeface="Calibri" pitchFamily="34" charset="-120"/>
+              </a:rPr>
+              <a:t>Cut to the rhythm of a weekend school: teacher mode, printable packs, a term that ends in something parents are invited to. Sold to a head teacher, not a procurement office.</a:t>
+            </a:r>
+            <a:endParaRPr lang="en-US" sz="800" dirty="0"/>
+          </a:p>
+        </p:txBody>
+      </p:sp>
+      <p:sp>
+        <p:nvSpPr>
+          <p:cNvPr id="65" name="Shape 63"/>
+          <p:cNvSpPr/>
+          <p:nvPr/>
+        </p:nvSpPr>
+        <p:spPr>
+          <a:xfrm>
+            <a:off x="7863840" y="4608576"/>
+            <a:ext cx="3429000" cy="1170432"/>
+          </a:xfrm>
+          <a:prstGeom prst="roundRect">
+            <a:avLst>
+              <a:gd name="adj" fmla="val 9375"/>
+            </a:avLst>
+          </a:prstGeom>
+          <a:solidFill>
+            <a:srgbClr val="EFEBF8"/>
+          </a:solidFill>
+          <a:ln/>
+        </p:spPr>
+      </p:sp>
+      <p:sp>
+        <p:nvSpPr>
+          <p:cNvPr id="66" name="Shape 64"/>
+          <p:cNvSpPr/>
+          <p:nvPr/>
+        </p:nvSpPr>
+        <p:spPr>
+          <a:xfrm>
+            <a:off x="7863840" y="4608576"/>
+            <a:ext cx="64008" cy="1170432"/>
+          </a:xfrm>
+          <a:prstGeom prst="rect">
+            <a:avLst/>
+          </a:prstGeom>
+          <a:solidFill>
+            <a:srgbClr val="6C4FE0"/>
+          </a:solidFill>
+          <a:ln/>
+        </p:spPr>
+      </p:sp>
+      <p:sp>
+        <p:nvSpPr>
+          <p:cNvPr id="67" name="Text 65"/>
+          <p:cNvSpPr/>
+          <p:nvPr/>
+        </p:nvSpPr>
+        <p:spPr>
+          <a:xfrm>
+            <a:off x="8083296" y="4690872"/>
+            <a:ext cx="3063240" cy="219456"/>
+          </a:xfrm>
+          <a:prstGeom prst="rect">
+            <a:avLst/>
+          </a:prstGeom>
+          <a:noFill/>
+          <a:ln/>
+        </p:spPr>
+        <p:txBody>
+          <a:bodyPr wrap="square" lIns="0" tIns="0" rIns="0" bIns="0" rtlCol="0" anchor="ctr"/>
+          <a:lstStyle/>
+          <a:p>
+            <a:pPr indent="0" marL="0">
+              <a:buNone/>
+            </a:pPr>
+            <a:r>
+              <a:rPr lang="en-US" sz="850" b="1" spc="120" kern="0" dirty="0">
+                <a:solidFill>
+                  <a:srgbClr val="6C4FE0"/>
+                </a:solidFill>
+                <a:latin typeface="Calibri" pitchFamily="34" charset="0"/>
+                <a:ea typeface="Calibri" pitchFamily="34" charset="-122"/>
+                <a:cs typeface="Calibri" pitchFamily="34" charset="-120"/>
+              </a:rPr>
+              <a:t>FOUNDERS’ EIGHT</a:t>
+            </a:r>
+            <a:endParaRPr lang="en-US" sz="850" dirty="0"/>
+          </a:p>
+        </p:txBody>
+      </p:sp>
+      <p:sp>
+        <p:nvSpPr>
+          <p:cNvPr id="68" name="Text 66"/>
+          <p:cNvSpPr/>
+          <p:nvPr/>
+        </p:nvSpPr>
+        <p:spPr>
+          <a:xfrm>
+            <a:off x="8083296" y="4892040"/>
+            <a:ext cx="3063240" cy="237744"/>
+          </a:xfrm>
+          <a:prstGeom prst="rect">
+            <a:avLst/>
+          </a:prstGeom>
+          <a:noFill/>
+          <a:ln/>
+        </p:spPr>
+        <p:txBody>
+          <a:bodyPr wrap="square" lIns="0" tIns="0" rIns="0" bIns="0" rtlCol="0" anchor="ctr"/>
+          <a:lstStyle/>
+          <a:p>
+            <a:pPr indent="0" marL="0">
+              <a:buNone/>
+            </a:pPr>
+            <a:r>
+              <a:rPr lang="en-US" sz="1100" b="1" dirty="0">
+                <a:solidFill>
+                  <a:srgbClr val="241E33"/>
+                </a:solidFill>
+                <a:latin typeface="Cambria" pitchFamily="34" charset="0"/>
+                <a:ea typeface="Cambria" pitchFamily="34" charset="-122"/>
+                <a:cs typeface="Cambria" pitchFamily="34" charset="-120"/>
+              </a:rPr>
+              <a:t>Bizzing Business, after school</a:t>
+            </a:r>
+            <a:endParaRPr lang="en-US" sz="1100" dirty="0"/>
+          </a:p>
+        </p:txBody>
+      </p:sp>
+      <p:sp>
+        <p:nvSpPr>
+          <p:cNvPr id="69" name="Text 67"/>
+          <p:cNvSpPr/>
+          <p:nvPr/>
+        </p:nvSpPr>
+        <p:spPr>
+          <a:xfrm>
+            <a:off x="8083296" y="5138928"/>
+            <a:ext cx="3063240" cy="566928"/>
+          </a:xfrm>
+          <a:prstGeom prst="rect">
+            <a:avLst/>
+          </a:prstGeom>
+          <a:noFill/>
+          <a:ln/>
+        </p:spPr>
+        <p:txBody>
+          <a:bodyPr wrap="square" lIns="0" tIns="0" rIns="0" bIns="0" rtlCol="0" anchor="ctr"/>
+          <a:lstStyle/>
+          <a:p>
+            <a:pPr indent="0" marL="0">
+              <a:lnSpc>
+                <a:spcPts val="1000"/>
+              </a:lnSpc>
+              <a:buNone/>
+            </a:pPr>
+            <a:r>
+              <a:rPr lang="en-US" sz="800" dirty="0">
+                <a:solidFill>
+                  <a:srgbClr val="4A4360"/>
+                </a:solidFill>
+                <a:latin typeface="Calibri" pitchFamily="34" charset="0"/>
+                <a:ea typeface="Calibri" pitchFamily="34" charset="-122"/>
+                <a:cs typeface="Calibri" pitchFamily="34" charset="-120"/>
+              </a:rPr>
+              <a:t>Eight weeks, a team, a mentor, a demo night. The highest price per family we have, and the one programme a school can put its own name on.</a:t>
+            </a:r>
+            <a:endParaRPr lang="en-US" sz="800" dirty="0"/>
+          </a:p>
+        </p:txBody>
+      </p:sp>
+      <p:sp>
+        <p:nvSpPr>
+          <p:cNvPr id="70" name="Shape 68"/>
+          <p:cNvSpPr/>
+          <p:nvPr/>
+        </p:nvSpPr>
+        <p:spPr>
+          <a:xfrm>
+            <a:off x="640080" y="5870448"/>
+            <a:ext cx="10607040" cy="914400"/>
+          </a:xfrm>
+          <a:prstGeom prst="roundRect">
+            <a:avLst>
+              <a:gd name="adj" fmla="val 12000"/>
+            </a:avLst>
+          </a:prstGeom>
+          <a:solidFill>
+            <a:srgbClr val="FBF3E0"/>
+          </a:solidFill>
+          <a:ln/>
+        </p:spPr>
+      </p:sp>
+      <p:sp>
+        <p:nvSpPr>
+          <p:cNvPr id="71" name="Text 69"/>
+          <p:cNvSpPr/>
+          <p:nvPr/>
+        </p:nvSpPr>
+        <p:spPr>
+          <a:xfrm>
+            <a:off x="896112" y="5925312"/>
+            <a:ext cx="7315200" cy="237744"/>
+          </a:xfrm>
+          <a:prstGeom prst="rect">
+            <a:avLst/>
+          </a:prstGeom>
+          <a:noFill/>
+          <a:ln/>
+        </p:spPr>
+        <p:txBody>
+          <a:bodyPr wrap="square" lIns="0" tIns="0" rIns="0" bIns="0" rtlCol="0" anchor="ctr"/>
+          <a:lstStyle/>
+          <a:p>
+            <a:pPr indent="0" marL="0">
+              <a:buNone/>
+            </a:pPr>
+            <a:r>
+              <a:rPr lang="en-US" sz="1000" b="1" dirty="0">
+                <a:solidFill>
+                  <a:srgbClr val="8A5B00"/>
+                </a:solidFill>
+                <a:latin typeface="Calibri" pitchFamily="34" charset="0"/>
+                <a:ea typeface="Calibri" pitchFamily="34" charset="-122"/>
+                <a:cs typeface="Calibri" pitchFamily="34" charset="-120"/>
+              </a:rPr>
+              <a:t>⚠ Every name on this slide needs verifying before anyone is contacted</a:t>
+            </a:r>
+            <a:endParaRPr lang="en-US" sz="1000" dirty="0"/>
+          </a:p>
+        </p:txBody>
+      </p:sp>
+      <p:sp>
+        <p:nvSpPr>
+          <p:cNvPr id="72" name="Text 70"/>
+          <p:cNvSpPr/>
+          <p:nvPr/>
+        </p:nvSpPr>
+        <p:spPr>
+          <a:xfrm>
+            <a:off x="896112" y="6126480"/>
+            <a:ext cx="10094976" cy="621792"/>
+          </a:xfrm>
+          <a:prstGeom prst="rect">
+            <a:avLst/>
+          </a:prstGeom>
+          <a:noFill/>
+          <a:ln/>
+        </p:spPr>
+        <p:txBody>
+          <a:bodyPr wrap="square" lIns="0" tIns="0" rIns="0" bIns="0" rtlCol="0" anchor="ctr"/>
+          <a:lstStyle/>
+          <a:p>
+            <a:pPr indent="0" marL="0">
+              <a:lnSpc>
+                <a:spcPts val="1100"/>
+              </a:lnSpc>
+              <a:buNone/>
+            </a:pPr>
+            <a:r>
+              <a:rPr lang="en-US" sz="900" dirty="0">
+                <a:solidFill>
+                  <a:srgbClr val="8A5B00"/>
+                </a:solidFill>
+                <a:latin typeface="Calibri" pitchFamily="34" charset="0"/>
+                <a:ea typeface="Calibri" pitchFamily="34" charset="-122"/>
+                <a:cs typeface="Calibri" pitchFamily="34" charset="-120"/>
+              </a:rPr>
+              <a:t>These organisations are named from working knowledge, not from research done today — chapter counts, programme names and even whether a body still operates all need checking. Three specific cautions. Scripps ships a competing app, so an approach there is a negotiation, not a partnership. SPELLPundit and Hexco are direct competitors before they are anything else. And in India, at least one major tutoring brand has been in serious financial distress — confirm a partner is solvent before building anything on them. Treat this slide as a research brief with a starting list, not as a contact sheet.</a:t>
+            </a:r>
+            <a:endParaRPr lang="en-US" sz="900" dirty="0"/>
+          </a:p>
+        </p:txBody>
+      </p:sp>
+    </p:spTree>
+  </p:cSld>
+  <p:clrMapOvr>
+    <a:masterClrMapping/>
+  </p:clrMapOvr>
+</p:sld>
+</file>
+
+<file path=ppt/slides/slide43.xml><?xml version="1.0" encoding="utf-8"?>
+<p:sld xmlns:a="http://schemas.openxmlformats.org/drawingml/2006/main" xmlns:r="http://schemas.openxmlformats.org/officeDocument/2006/relationships" xmlns:p="http://schemas.openxmlformats.org/presentationml/2006/main">
+  <p:cSld name="Slide 43">
+    <p:bg>
+      <p:bgPr>
+        <a:solidFill>
           <a:srgbClr val="241E33"/>
         </a:solidFill>
       </p:bgPr>
